--- a/docs/presentation/files-in slide/slide-20-thank-you.pptx
+++ b/docs/presentation/files-in slide/slide-20-thank-you.pptx
@@ -10,8 +10,8 @@
   <p:notesMasterIdLst>
     <p:notesMasterId r:id="rId3"/>
   </p:notesMasterIdLst>
-  <p:sldSz cx="12192000" cy="6858000"/>
-  <p:notesSz cx="6858000" cy="12192000"/>
+  <p:sldSz cx="12191695" cy="6858000"/>
+  <p:notesSz cx="6858000" cy="12191695"/>
   <p:defaultTextStyle>
     <a:lvl1pPr marL="0" algn="l" defTabSz="914400" rtl="0" eaLnBrk="1" latinLnBrk="0" hangingPunct="1">
       <a:defRPr sz="1800" kern="1200">
@@ -857,7 +857,7 @@
     <p:bg>
       <p:bgPr>
         <a:solidFill>
-          <a:srgbClr val="1A1A2E"/>
+          <a:srgbClr val="F7F4EF"/>
         </a:solidFill>
       </p:bgPr>
     </p:bg>
@@ -877,14 +877,1314 @@
       </p:grpSpPr>
       <p:sp>
         <p:nvSpPr>
-          <p:cNvPr id="2" name="Text 0"/>
+          <p:cNvPr id="2" name="Shape 0"/>
+          <p:cNvSpPr/>
+          <p:nvPr/>
+        </p:nvSpPr>
+        <p:spPr>
+          <a:xfrm>
+            <a:off x="0" y="0"/>
+            <a:ext cx="0" cy="6858000"/>
+          </a:xfrm>
+          <a:prstGeom prst="line">
+            <a:avLst/>
+          </a:prstGeom>
+          <a:noFill/>
+          <a:ln w="9525">
+            <a:solidFill>
+              <a:srgbClr val="000000">
+                <a:alpha val="5000"/>
+              </a:srgbClr>
+            </a:solidFill>
+            <a:prstDash val="solid"/>
+          </a:ln>
+        </p:spPr>
+      </p:sp>
+      <p:sp>
+        <p:nvSpPr>
+          <p:cNvPr id="3" name="Shape 1"/>
+          <p:cNvSpPr/>
+          <p:nvPr/>
+        </p:nvSpPr>
+        <p:spPr>
+          <a:xfrm>
+            <a:off x="381000" y="0"/>
+            <a:ext cx="0" cy="6858000"/>
+          </a:xfrm>
+          <a:prstGeom prst="line">
+            <a:avLst/>
+          </a:prstGeom>
+          <a:noFill/>
+          <a:ln w="9525">
+            <a:solidFill>
+              <a:srgbClr val="000000">
+                <a:alpha val="5000"/>
+              </a:srgbClr>
+            </a:solidFill>
+            <a:prstDash val="solid"/>
+          </a:ln>
+        </p:spPr>
+      </p:sp>
+      <p:sp>
+        <p:nvSpPr>
+          <p:cNvPr id="4" name="Shape 2"/>
+          <p:cNvSpPr/>
+          <p:nvPr/>
+        </p:nvSpPr>
+        <p:spPr>
+          <a:xfrm>
+            <a:off x="762000" y="0"/>
+            <a:ext cx="0" cy="6858000"/>
+          </a:xfrm>
+          <a:prstGeom prst="line">
+            <a:avLst/>
+          </a:prstGeom>
+          <a:noFill/>
+          <a:ln w="9525">
+            <a:solidFill>
+              <a:srgbClr val="000000">
+                <a:alpha val="5000"/>
+              </a:srgbClr>
+            </a:solidFill>
+            <a:prstDash val="solid"/>
+          </a:ln>
+        </p:spPr>
+      </p:sp>
+      <p:sp>
+        <p:nvSpPr>
+          <p:cNvPr id="5" name="Shape 3"/>
+          <p:cNvSpPr/>
+          <p:nvPr/>
+        </p:nvSpPr>
+        <p:spPr>
+          <a:xfrm>
+            <a:off x="1143000" y="0"/>
+            <a:ext cx="0" cy="6858000"/>
+          </a:xfrm>
+          <a:prstGeom prst="line">
+            <a:avLst/>
+          </a:prstGeom>
+          <a:noFill/>
+          <a:ln w="9525">
+            <a:solidFill>
+              <a:srgbClr val="000000">
+                <a:alpha val="5000"/>
+              </a:srgbClr>
+            </a:solidFill>
+            <a:prstDash val="solid"/>
+          </a:ln>
+        </p:spPr>
+      </p:sp>
+      <p:sp>
+        <p:nvSpPr>
+          <p:cNvPr id="6" name="Shape 4"/>
+          <p:cNvSpPr/>
+          <p:nvPr/>
+        </p:nvSpPr>
+        <p:spPr>
+          <a:xfrm>
+            <a:off x="1524000" y="0"/>
+            <a:ext cx="0" cy="6858000"/>
+          </a:xfrm>
+          <a:prstGeom prst="line">
+            <a:avLst/>
+          </a:prstGeom>
+          <a:noFill/>
+          <a:ln w="9525">
+            <a:solidFill>
+              <a:srgbClr val="000000">
+                <a:alpha val="5000"/>
+              </a:srgbClr>
+            </a:solidFill>
+            <a:prstDash val="solid"/>
+          </a:ln>
+        </p:spPr>
+      </p:sp>
+      <p:sp>
+        <p:nvSpPr>
+          <p:cNvPr id="7" name="Shape 5"/>
+          <p:cNvSpPr/>
+          <p:nvPr/>
+        </p:nvSpPr>
+        <p:spPr>
+          <a:xfrm>
+            <a:off x="1905000" y="0"/>
+            <a:ext cx="0" cy="6858000"/>
+          </a:xfrm>
+          <a:prstGeom prst="line">
+            <a:avLst/>
+          </a:prstGeom>
+          <a:noFill/>
+          <a:ln w="9525">
+            <a:solidFill>
+              <a:srgbClr val="000000">
+                <a:alpha val="5000"/>
+              </a:srgbClr>
+            </a:solidFill>
+            <a:prstDash val="solid"/>
+          </a:ln>
+        </p:spPr>
+      </p:sp>
+      <p:sp>
+        <p:nvSpPr>
+          <p:cNvPr id="8" name="Shape 6"/>
+          <p:cNvSpPr/>
+          <p:nvPr/>
+        </p:nvSpPr>
+        <p:spPr>
+          <a:xfrm>
+            <a:off x="2286000" y="0"/>
+            <a:ext cx="0" cy="6858000"/>
+          </a:xfrm>
+          <a:prstGeom prst="line">
+            <a:avLst/>
+          </a:prstGeom>
+          <a:noFill/>
+          <a:ln w="9525">
+            <a:solidFill>
+              <a:srgbClr val="000000">
+                <a:alpha val="5000"/>
+              </a:srgbClr>
+            </a:solidFill>
+            <a:prstDash val="solid"/>
+          </a:ln>
+        </p:spPr>
+      </p:sp>
+      <p:sp>
+        <p:nvSpPr>
+          <p:cNvPr id="9" name="Shape 7"/>
+          <p:cNvSpPr/>
+          <p:nvPr/>
+        </p:nvSpPr>
+        <p:spPr>
+          <a:xfrm>
+            <a:off x="2667000" y="0"/>
+            <a:ext cx="0" cy="6858000"/>
+          </a:xfrm>
+          <a:prstGeom prst="line">
+            <a:avLst/>
+          </a:prstGeom>
+          <a:noFill/>
+          <a:ln w="9525">
+            <a:solidFill>
+              <a:srgbClr val="000000">
+                <a:alpha val="5000"/>
+              </a:srgbClr>
+            </a:solidFill>
+            <a:prstDash val="solid"/>
+          </a:ln>
+        </p:spPr>
+      </p:sp>
+      <p:sp>
+        <p:nvSpPr>
+          <p:cNvPr id="10" name="Shape 8"/>
+          <p:cNvSpPr/>
+          <p:nvPr/>
+        </p:nvSpPr>
+        <p:spPr>
+          <a:xfrm>
+            <a:off x="3048000" y="0"/>
+            <a:ext cx="0" cy="6858000"/>
+          </a:xfrm>
+          <a:prstGeom prst="line">
+            <a:avLst/>
+          </a:prstGeom>
+          <a:noFill/>
+          <a:ln w="9525">
+            <a:solidFill>
+              <a:srgbClr val="000000">
+                <a:alpha val="5000"/>
+              </a:srgbClr>
+            </a:solidFill>
+            <a:prstDash val="solid"/>
+          </a:ln>
+        </p:spPr>
+      </p:sp>
+      <p:sp>
+        <p:nvSpPr>
+          <p:cNvPr id="11" name="Shape 9"/>
+          <p:cNvSpPr/>
+          <p:nvPr/>
+        </p:nvSpPr>
+        <p:spPr>
+          <a:xfrm>
+            <a:off x="3429000" y="0"/>
+            <a:ext cx="0" cy="6858000"/>
+          </a:xfrm>
+          <a:prstGeom prst="line">
+            <a:avLst/>
+          </a:prstGeom>
+          <a:noFill/>
+          <a:ln w="9525">
+            <a:solidFill>
+              <a:srgbClr val="000000">
+                <a:alpha val="5000"/>
+              </a:srgbClr>
+            </a:solidFill>
+            <a:prstDash val="solid"/>
+          </a:ln>
+        </p:spPr>
+      </p:sp>
+      <p:sp>
+        <p:nvSpPr>
+          <p:cNvPr id="12" name="Shape 10"/>
+          <p:cNvSpPr/>
+          <p:nvPr/>
+        </p:nvSpPr>
+        <p:spPr>
+          <a:xfrm>
+            <a:off x="3810000" y="0"/>
+            <a:ext cx="0" cy="6858000"/>
+          </a:xfrm>
+          <a:prstGeom prst="line">
+            <a:avLst/>
+          </a:prstGeom>
+          <a:noFill/>
+          <a:ln w="9525">
+            <a:solidFill>
+              <a:srgbClr val="000000">
+                <a:alpha val="5000"/>
+              </a:srgbClr>
+            </a:solidFill>
+            <a:prstDash val="solid"/>
+          </a:ln>
+        </p:spPr>
+      </p:sp>
+      <p:sp>
+        <p:nvSpPr>
+          <p:cNvPr id="13" name="Shape 11"/>
+          <p:cNvSpPr/>
+          <p:nvPr/>
+        </p:nvSpPr>
+        <p:spPr>
+          <a:xfrm>
+            <a:off x="4191000" y="0"/>
+            <a:ext cx="0" cy="6858000"/>
+          </a:xfrm>
+          <a:prstGeom prst="line">
+            <a:avLst/>
+          </a:prstGeom>
+          <a:noFill/>
+          <a:ln w="9525">
+            <a:solidFill>
+              <a:srgbClr val="000000">
+                <a:alpha val="5000"/>
+              </a:srgbClr>
+            </a:solidFill>
+            <a:prstDash val="solid"/>
+          </a:ln>
+        </p:spPr>
+      </p:sp>
+      <p:sp>
+        <p:nvSpPr>
+          <p:cNvPr id="14" name="Shape 12"/>
+          <p:cNvSpPr/>
+          <p:nvPr/>
+        </p:nvSpPr>
+        <p:spPr>
+          <a:xfrm>
+            <a:off x="4572000" y="0"/>
+            <a:ext cx="0" cy="6858000"/>
+          </a:xfrm>
+          <a:prstGeom prst="line">
+            <a:avLst/>
+          </a:prstGeom>
+          <a:noFill/>
+          <a:ln w="9525">
+            <a:solidFill>
+              <a:srgbClr val="000000">
+                <a:alpha val="5000"/>
+              </a:srgbClr>
+            </a:solidFill>
+            <a:prstDash val="solid"/>
+          </a:ln>
+        </p:spPr>
+      </p:sp>
+      <p:sp>
+        <p:nvSpPr>
+          <p:cNvPr id="15" name="Shape 13"/>
+          <p:cNvSpPr/>
+          <p:nvPr/>
+        </p:nvSpPr>
+        <p:spPr>
+          <a:xfrm>
+            <a:off x="4953000" y="0"/>
+            <a:ext cx="0" cy="6858000"/>
+          </a:xfrm>
+          <a:prstGeom prst="line">
+            <a:avLst/>
+          </a:prstGeom>
+          <a:noFill/>
+          <a:ln w="9525">
+            <a:solidFill>
+              <a:srgbClr val="000000">
+                <a:alpha val="5000"/>
+              </a:srgbClr>
+            </a:solidFill>
+            <a:prstDash val="solid"/>
+          </a:ln>
+        </p:spPr>
+      </p:sp>
+      <p:sp>
+        <p:nvSpPr>
+          <p:cNvPr id="16" name="Shape 14"/>
+          <p:cNvSpPr/>
+          <p:nvPr/>
+        </p:nvSpPr>
+        <p:spPr>
+          <a:xfrm>
+            <a:off x="5334000" y="0"/>
+            <a:ext cx="0" cy="6858000"/>
+          </a:xfrm>
+          <a:prstGeom prst="line">
+            <a:avLst/>
+          </a:prstGeom>
+          <a:noFill/>
+          <a:ln w="9525">
+            <a:solidFill>
+              <a:srgbClr val="000000">
+                <a:alpha val="5000"/>
+              </a:srgbClr>
+            </a:solidFill>
+            <a:prstDash val="solid"/>
+          </a:ln>
+        </p:spPr>
+      </p:sp>
+      <p:sp>
+        <p:nvSpPr>
+          <p:cNvPr id="17" name="Shape 15"/>
+          <p:cNvSpPr/>
+          <p:nvPr/>
+        </p:nvSpPr>
+        <p:spPr>
+          <a:xfrm>
+            <a:off x="5715000" y="0"/>
+            <a:ext cx="0" cy="6858000"/>
+          </a:xfrm>
+          <a:prstGeom prst="line">
+            <a:avLst/>
+          </a:prstGeom>
+          <a:noFill/>
+          <a:ln w="9525">
+            <a:solidFill>
+              <a:srgbClr val="000000">
+                <a:alpha val="5000"/>
+              </a:srgbClr>
+            </a:solidFill>
+            <a:prstDash val="solid"/>
+          </a:ln>
+        </p:spPr>
+      </p:sp>
+      <p:sp>
+        <p:nvSpPr>
+          <p:cNvPr id="18" name="Shape 16"/>
+          <p:cNvSpPr/>
+          <p:nvPr/>
+        </p:nvSpPr>
+        <p:spPr>
+          <a:xfrm>
+            <a:off x="6096000" y="0"/>
+            <a:ext cx="0" cy="6858000"/>
+          </a:xfrm>
+          <a:prstGeom prst="line">
+            <a:avLst/>
+          </a:prstGeom>
+          <a:noFill/>
+          <a:ln w="9525">
+            <a:solidFill>
+              <a:srgbClr val="000000">
+                <a:alpha val="5000"/>
+              </a:srgbClr>
+            </a:solidFill>
+            <a:prstDash val="solid"/>
+          </a:ln>
+        </p:spPr>
+      </p:sp>
+      <p:sp>
+        <p:nvSpPr>
+          <p:cNvPr id="19" name="Shape 17"/>
+          <p:cNvSpPr/>
+          <p:nvPr/>
+        </p:nvSpPr>
+        <p:spPr>
+          <a:xfrm>
+            <a:off x="6477000" y="0"/>
+            <a:ext cx="0" cy="6858000"/>
+          </a:xfrm>
+          <a:prstGeom prst="line">
+            <a:avLst/>
+          </a:prstGeom>
+          <a:noFill/>
+          <a:ln w="9525">
+            <a:solidFill>
+              <a:srgbClr val="000000">
+                <a:alpha val="5000"/>
+              </a:srgbClr>
+            </a:solidFill>
+            <a:prstDash val="solid"/>
+          </a:ln>
+        </p:spPr>
+      </p:sp>
+      <p:sp>
+        <p:nvSpPr>
+          <p:cNvPr id="20" name="Shape 18"/>
+          <p:cNvSpPr/>
+          <p:nvPr/>
+        </p:nvSpPr>
+        <p:spPr>
+          <a:xfrm>
+            <a:off x="6858000" y="0"/>
+            <a:ext cx="0" cy="6858000"/>
+          </a:xfrm>
+          <a:prstGeom prst="line">
+            <a:avLst/>
+          </a:prstGeom>
+          <a:noFill/>
+          <a:ln w="9525">
+            <a:solidFill>
+              <a:srgbClr val="000000">
+                <a:alpha val="5000"/>
+              </a:srgbClr>
+            </a:solidFill>
+            <a:prstDash val="solid"/>
+          </a:ln>
+        </p:spPr>
+      </p:sp>
+      <p:sp>
+        <p:nvSpPr>
+          <p:cNvPr id="21" name="Shape 19"/>
+          <p:cNvSpPr/>
+          <p:nvPr/>
+        </p:nvSpPr>
+        <p:spPr>
+          <a:xfrm>
+            <a:off x="7239000" y="0"/>
+            <a:ext cx="0" cy="6858000"/>
+          </a:xfrm>
+          <a:prstGeom prst="line">
+            <a:avLst/>
+          </a:prstGeom>
+          <a:noFill/>
+          <a:ln w="9525">
+            <a:solidFill>
+              <a:srgbClr val="000000">
+                <a:alpha val="5000"/>
+              </a:srgbClr>
+            </a:solidFill>
+            <a:prstDash val="solid"/>
+          </a:ln>
+        </p:spPr>
+      </p:sp>
+      <p:sp>
+        <p:nvSpPr>
+          <p:cNvPr id="22" name="Shape 20"/>
+          <p:cNvSpPr/>
+          <p:nvPr/>
+        </p:nvSpPr>
+        <p:spPr>
+          <a:xfrm>
+            <a:off x="7620000" y="0"/>
+            <a:ext cx="0" cy="6858000"/>
+          </a:xfrm>
+          <a:prstGeom prst="line">
+            <a:avLst/>
+          </a:prstGeom>
+          <a:noFill/>
+          <a:ln w="9525">
+            <a:solidFill>
+              <a:srgbClr val="000000">
+                <a:alpha val="5000"/>
+              </a:srgbClr>
+            </a:solidFill>
+            <a:prstDash val="solid"/>
+          </a:ln>
+        </p:spPr>
+      </p:sp>
+      <p:sp>
+        <p:nvSpPr>
+          <p:cNvPr id="23" name="Shape 21"/>
+          <p:cNvSpPr/>
+          <p:nvPr/>
+        </p:nvSpPr>
+        <p:spPr>
+          <a:xfrm>
+            <a:off x="8001000" y="0"/>
+            <a:ext cx="0" cy="6858000"/>
+          </a:xfrm>
+          <a:prstGeom prst="line">
+            <a:avLst/>
+          </a:prstGeom>
+          <a:noFill/>
+          <a:ln w="9525">
+            <a:solidFill>
+              <a:srgbClr val="000000">
+                <a:alpha val="5000"/>
+              </a:srgbClr>
+            </a:solidFill>
+            <a:prstDash val="solid"/>
+          </a:ln>
+        </p:spPr>
+      </p:sp>
+      <p:sp>
+        <p:nvSpPr>
+          <p:cNvPr id="24" name="Shape 22"/>
+          <p:cNvSpPr/>
+          <p:nvPr/>
+        </p:nvSpPr>
+        <p:spPr>
+          <a:xfrm>
+            <a:off x="8382000" y="0"/>
+            <a:ext cx="0" cy="6858000"/>
+          </a:xfrm>
+          <a:prstGeom prst="line">
+            <a:avLst/>
+          </a:prstGeom>
+          <a:noFill/>
+          <a:ln w="9525">
+            <a:solidFill>
+              <a:srgbClr val="000000">
+                <a:alpha val="5000"/>
+              </a:srgbClr>
+            </a:solidFill>
+            <a:prstDash val="solid"/>
+          </a:ln>
+        </p:spPr>
+      </p:sp>
+      <p:sp>
+        <p:nvSpPr>
+          <p:cNvPr id="25" name="Shape 23"/>
+          <p:cNvSpPr/>
+          <p:nvPr/>
+        </p:nvSpPr>
+        <p:spPr>
+          <a:xfrm>
+            <a:off x="8763000" y="0"/>
+            <a:ext cx="0" cy="6858000"/>
+          </a:xfrm>
+          <a:prstGeom prst="line">
+            <a:avLst/>
+          </a:prstGeom>
+          <a:noFill/>
+          <a:ln w="9525">
+            <a:solidFill>
+              <a:srgbClr val="000000">
+                <a:alpha val="5000"/>
+              </a:srgbClr>
+            </a:solidFill>
+            <a:prstDash val="solid"/>
+          </a:ln>
+        </p:spPr>
+      </p:sp>
+      <p:sp>
+        <p:nvSpPr>
+          <p:cNvPr id="26" name="Shape 24"/>
+          <p:cNvSpPr/>
+          <p:nvPr/>
+        </p:nvSpPr>
+        <p:spPr>
+          <a:xfrm>
+            <a:off x="9144000" y="0"/>
+            <a:ext cx="0" cy="6858000"/>
+          </a:xfrm>
+          <a:prstGeom prst="line">
+            <a:avLst/>
+          </a:prstGeom>
+          <a:noFill/>
+          <a:ln w="9525">
+            <a:solidFill>
+              <a:srgbClr val="000000">
+                <a:alpha val="5000"/>
+              </a:srgbClr>
+            </a:solidFill>
+            <a:prstDash val="solid"/>
+          </a:ln>
+        </p:spPr>
+      </p:sp>
+      <p:sp>
+        <p:nvSpPr>
+          <p:cNvPr id="27" name="Shape 25"/>
+          <p:cNvSpPr/>
+          <p:nvPr/>
+        </p:nvSpPr>
+        <p:spPr>
+          <a:xfrm>
+            <a:off x="9525000" y="0"/>
+            <a:ext cx="0" cy="6858000"/>
+          </a:xfrm>
+          <a:prstGeom prst="line">
+            <a:avLst/>
+          </a:prstGeom>
+          <a:noFill/>
+          <a:ln w="9525">
+            <a:solidFill>
+              <a:srgbClr val="000000">
+                <a:alpha val="5000"/>
+              </a:srgbClr>
+            </a:solidFill>
+            <a:prstDash val="solid"/>
+          </a:ln>
+        </p:spPr>
+      </p:sp>
+      <p:sp>
+        <p:nvSpPr>
+          <p:cNvPr id="28" name="Shape 26"/>
+          <p:cNvSpPr/>
+          <p:nvPr/>
+        </p:nvSpPr>
+        <p:spPr>
+          <a:xfrm>
+            <a:off x="9906000" y="0"/>
+            <a:ext cx="0" cy="6858000"/>
+          </a:xfrm>
+          <a:prstGeom prst="line">
+            <a:avLst/>
+          </a:prstGeom>
+          <a:noFill/>
+          <a:ln w="9525">
+            <a:solidFill>
+              <a:srgbClr val="000000">
+                <a:alpha val="5000"/>
+              </a:srgbClr>
+            </a:solidFill>
+            <a:prstDash val="solid"/>
+          </a:ln>
+        </p:spPr>
+      </p:sp>
+      <p:sp>
+        <p:nvSpPr>
+          <p:cNvPr id="29" name="Shape 27"/>
+          <p:cNvSpPr/>
+          <p:nvPr/>
+        </p:nvSpPr>
+        <p:spPr>
+          <a:xfrm>
+            <a:off x="10287000" y="0"/>
+            <a:ext cx="0" cy="6858000"/>
+          </a:xfrm>
+          <a:prstGeom prst="line">
+            <a:avLst/>
+          </a:prstGeom>
+          <a:noFill/>
+          <a:ln w="9525">
+            <a:solidFill>
+              <a:srgbClr val="000000">
+                <a:alpha val="5000"/>
+              </a:srgbClr>
+            </a:solidFill>
+            <a:prstDash val="solid"/>
+          </a:ln>
+        </p:spPr>
+      </p:sp>
+      <p:sp>
+        <p:nvSpPr>
+          <p:cNvPr id="30" name="Shape 28"/>
+          <p:cNvSpPr/>
+          <p:nvPr/>
+        </p:nvSpPr>
+        <p:spPr>
+          <a:xfrm>
+            <a:off x="10668000" y="0"/>
+            <a:ext cx="0" cy="6858000"/>
+          </a:xfrm>
+          <a:prstGeom prst="line">
+            <a:avLst/>
+          </a:prstGeom>
+          <a:noFill/>
+          <a:ln w="9525">
+            <a:solidFill>
+              <a:srgbClr val="000000">
+                <a:alpha val="5000"/>
+              </a:srgbClr>
+            </a:solidFill>
+            <a:prstDash val="solid"/>
+          </a:ln>
+        </p:spPr>
+      </p:sp>
+      <p:sp>
+        <p:nvSpPr>
+          <p:cNvPr id="31" name="Shape 29"/>
+          <p:cNvSpPr/>
+          <p:nvPr/>
+        </p:nvSpPr>
+        <p:spPr>
+          <a:xfrm>
+            <a:off x="11049000" y="0"/>
+            <a:ext cx="0" cy="6858000"/>
+          </a:xfrm>
+          <a:prstGeom prst="line">
+            <a:avLst/>
+          </a:prstGeom>
+          <a:noFill/>
+          <a:ln w="9525">
+            <a:solidFill>
+              <a:srgbClr val="000000">
+                <a:alpha val="5000"/>
+              </a:srgbClr>
+            </a:solidFill>
+            <a:prstDash val="solid"/>
+          </a:ln>
+        </p:spPr>
+      </p:sp>
+      <p:sp>
+        <p:nvSpPr>
+          <p:cNvPr id="32" name="Shape 30"/>
+          <p:cNvSpPr/>
+          <p:nvPr/>
+        </p:nvSpPr>
+        <p:spPr>
+          <a:xfrm>
+            <a:off x="11430000" y="0"/>
+            <a:ext cx="0" cy="6858000"/>
+          </a:xfrm>
+          <a:prstGeom prst="line">
+            <a:avLst/>
+          </a:prstGeom>
+          <a:noFill/>
+          <a:ln w="9525">
+            <a:solidFill>
+              <a:srgbClr val="000000">
+                <a:alpha val="5000"/>
+              </a:srgbClr>
+            </a:solidFill>
+            <a:prstDash val="solid"/>
+          </a:ln>
+        </p:spPr>
+      </p:sp>
+      <p:sp>
+        <p:nvSpPr>
+          <p:cNvPr id="33" name="Shape 31"/>
+          <p:cNvSpPr/>
+          <p:nvPr/>
+        </p:nvSpPr>
+        <p:spPr>
+          <a:xfrm>
+            <a:off x="11811000" y="0"/>
+            <a:ext cx="0" cy="6858000"/>
+          </a:xfrm>
+          <a:prstGeom prst="line">
+            <a:avLst/>
+          </a:prstGeom>
+          <a:noFill/>
+          <a:ln w="9525">
+            <a:solidFill>
+              <a:srgbClr val="000000">
+                <a:alpha val="5000"/>
+              </a:srgbClr>
+            </a:solidFill>
+            <a:prstDash val="solid"/>
+          </a:ln>
+        </p:spPr>
+      </p:sp>
+      <p:sp>
+        <p:nvSpPr>
+          <p:cNvPr id="34" name="Shape 32"/>
+          <p:cNvSpPr/>
+          <p:nvPr/>
+        </p:nvSpPr>
+        <p:spPr>
+          <a:xfrm>
+            <a:off x="12192000" y="0"/>
+            <a:ext cx="0" cy="6858000"/>
+          </a:xfrm>
+          <a:prstGeom prst="line">
+            <a:avLst/>
+          </a:prstGeom>
+          <a:noFill/>
+          <a:ln w="9525">
+            <a:solidFill>
+              <a:srgbClr val="000000">
+                <a:alpha val="5000"/>
+              </a:srgbClr>
+            </a:solidFill>
+            <a:prstDash val="solid"/>
+          </a:ln>
+        </p:spPr>
+      </p:sp>
+      <p:sp>
+        <p:nvSpPr>
+          <p:cNvPr id="35" name="Shape 33"/>
+          <p:cNvSpPr/>
+          <p:nvPr/>
+        </p:nvSpPr>
+        <p:spPr>
+          <a:xfrm>
+            <a:off x="0" y="0"/>
+            <a:ext cx="12191695" cy="0"/>
+          </a:xfrm>
+          <a:prstGeom prst="line">
+            <a:avLst/>
+          </a:prstGeom>
+          <a:noFill/>
+          <a:ln w="9525">
+            <a:solidFill>
+              <a:srgbClr val="000000">
+                <a:alpha val="5000"/>
+              </a:srgbClr>
+            </a:solidFill>
+            <a:prstDash val="solid"/>
+          </a:ln>
+        </p:spPr>
+      </p:sp>
+      <p:sp>
+        <p:nvSpPr>
+          <p:cNvPr id="36" name="Shape 34"/>
+          <p:cNvSpPr/>
+          <p:nvPr/>
+        </p:nvSpPr>
+        <p:spPr>
+          <a:xfrm>
+            <a:off x="0" y="381000"/>
+            <a:ext cx="12191695" cy="0"/>
+          </a:xfrm>
+          <a:prstGeom prst="line">
+            <a:avLst/>
+          </a:prstGeom>
+          <a:noFill/>
+          <a:ln w="9525">
+            <a:solidFill>
+              <a:srgbClr val="000000">
+                <a:alpha val="5000"/>
+              </a:srgbClr>
+            </a:solidFill>
+            <a:prstDash val="solid"/>
+          </a:ln>
+        </p:spPr>
+      </p:sp>
+      <p:sp>
+        <p:nvSpPr>
+          <p:cNvPr id="37" name="Shape 35"/>
+          <p:cNvSpPr/>
+          <p:nvPr/>
+        </p:nvSpPr>
+        <p:spPr>
+          <a:xfrm>
+            <a:off x="0" y="762000"/>
+            <a:ext cx="12191695" cy="0"/>
+          </a:xfrm>
+          <a:prstGeom prst="line">
+            <a:avLst/>
+          </a:prstGeom>
+          <a:noFill/>
+          <a:ln w="9525">
+            <a:solidFill>
+              <a:srgbClr val="000000">
+                <a:alpha val="5000"/>
+              </a:srgbClr>
+            </a:solidFill>
+            <a:prstDash val="solid"/>
+          </a:ln>
+        </p:spPr>
+      </p:sp>
+      <p:sp>
+        <p:nvSpPr>
+          <p:cNvPr id="38" name="Shape 36"/>
+          <p:cNvSpPr/>
+          <p:nvPr/>
+        </p:nvSpPr>
+        <p:spPr>
+          <a:xfrm>
+            <a:off x="0" y="1143000"/>
+            <a:ext cx="12191695" cy="0"/>
+          </a:xfrm>
+          <a:prstGeom prst="line">
+            <a:avLst/>
+          </a:prstGeom>
+          <a:noFill/>
+          <a:ln w="9525">
+            <a:solidFill>
+              <a:srgbClr val="000000">
+                <a:alpha val="5000"/>
+              </a:srgbClr>
+            </a:solidFill>
+            <a:prstDash val="solid"/>
+          </a:ln>
+        </p:spPr>
+      </p:sp>
+      <p:sp>
+        <p:nvSpPr>
+          <p:cNvPr id="39" name="Shape 37"/>
+          <p:cNvSpPr/>
+          <p:nvPr/>
+        </p:nvSpPr>
+        <p:spPr>
+          <a:xfrm>
+            <a:off x="0" y="1524000"/>
+            <a:ext cx="12191695" cy="0"/>
+          </a:xfrm>
+          <a:prstGeom prst="line">
+            <a:avLst/>
+          </a:prstGeom>
+          <a:noFill/>
+          <a:ln w="9525">
+            <a:solidFill>
+              <a:srgbClr val="000000">
+                <a:alpha val="5000"/>
+              </a:srgbClr>
+            </a:solidFill>
+            <a:prstDash val="solid"/>
+          </a:ln>
+        </p:spPr>
+      </p:sp>
+      <p:sp>
+        <p:nvSpPr>
+          <p:cNvPr id="40" name="Shape 38"/>
+          <p:cNvSpPr/>
+          <p:nvPr/>
+        </p:nvSpPr>
+        <p:spPr>
+          <a:xfrm>
+            <a:off x="0" y="1905000"/>
+            <a:ext cx="12191695" cy="0"/>
+          </a:xfrm>
+          <a:prstGeom prst="line">
+            <a:avLst/>
+          </a:prstGeom>
+          <a:noFill/>
+          <a:ln w="9525">
+            <a:solidFill>
+              <a:srgbClr val="000000">
+                <a:alpha val="5000"/>
+              </a:srgbClr>
+            </a:solidFill>
+            <a:prstDash val="solid"/>
+          </a:ln>
+        </p:spPr>
+      </p:sp>
+      <p:sp>
+        <p:nvSpPr>
+          <p:cNvPr id="41" name="Shape 39"/>
+          <p:cNvSpPr/>
+          <p:nvPr/>
+        </p:nvSpPr>
+        <p:spPr>
+          <a:xfrm>
+            <a:off x="0" y="2286000"/>
+            <a:ext cx="12191695" cy="0"/>
+          </a:xfrm>
+          <a:prstGeom prst="line">
+            <a:avLst/>
+          </a:prstGeom>
+          <a:noFill/>
+          <a:ln w="9525">
+            <a:solidFill>
+              <a:srgbClr val="000000">
+                <a:alpha val="5000"/>
+              </a:srgbClr>
+            </a:solidFill>
+            <a:prstDash val="solid"/>
+          </a:ln>
+        </p:spPr>
+      </p:sp>
+      <p:sp>
+        <p:nvSpPr>
+          <p:cNvPr id="42" name="Shape 40"/>
+          <p:cNvSpPr/>
+          <p:nvPr/>
+        </p:nvSpPr>
+        <p:spPr>
+          <a:xfrm>
+            <a:off x="0" y="2667000"/>
+            <a:ext cx="12191695" cy="0"/>
+          </a:xfrm>
+          <a:prstGeom prst="line">
+            <a:avLst/>
+          </a:prstGeom>
+          <a:noFill/>
+          <a:ln w="9525">
+            <a:solidFill>
+              <a:srgbClr val="000000">
+                <a:alpha val="5000"/>
+              </a:srgbClr>
+            </a:solidFill>
+            <a:prstDash val="solid"/>
+          </a:ln>
+        </p:spPr>
+      </p:sp>
+      <p:sp>
+        <p:nvSpPr>
+          <p:cNvPr id="43" name="Shape 41"/>
+          <p:cNvSpPr/>
+          <p:nvPr/>
+        </p:nvSpPr>
+        <p:spPr>
+          <a:xfrm>
+            <a:off x="0" y="3048000"/>
+            <a:ext cx="12191695" cy="0"/>
+          </a:xfrm>
+          <a:prstGeom prst="line">
+            <a:avLst/>
+          </a:prstGeom>
+          <a:noFill/>
+          <a:ln w="9525">
+            <a:solidFill>
+              <a:srgbClr val="000000">
+                <a:alpha val="5000"/>
+              </a:srgbClr>
+            </a:solidFill>
+            <a:prstDash val="solid"/>
+          </a:ln>
+        </p:spPr>
+      </p:sp>
+      <p:sp>
+        <p:nvSpPr>
+          <p:cNvPr id="44" name="Shape 42"/>
+          <p:cNvSpPr/>
+          <p:nvPr/>
+        </p:nvSpPr>
+        <p:spPr>
+          <a:xfrm>
+            <a:off x="0" y="3429000"/>
+            <a:ext cx="12191695" cy="0"/>
+          </a:xfrm>
+          <a:prstGeom prst="line">
+            <a:avLst/>
+          </a:prstGeom>
+          <a:noFill/>
+          <a:ln w="9525">
+            <a:solidFill>
+              <a:srgbClr val="000000">
+                <a:alpha val="5000"/>
+              </a:srgbClr>
+            </a:solidFill>
+            <a:prstDash val="solid"/>
+          </a:ln>
+        </p:spPr>
+      </p:sp>
+      <p:sp>
+        <p:nvSpPr>
+          <p:cNvPr id="45" name="Shape 43"/>
+          <p:cNvSpPr/>
+          <p:nvPr/>
+        </p:nvSpPr>
+        <p:spPr>
+          <a:xfrm>
+            <a:off x="0" y="3810000"/>
+            <a:ext cx="12191695" cy="0"/>
+          </a:xfrm>
+          <a:prstGeom prst="line">
+            <a:avLst/>
+          </a:prstGeom>
+          <a:noFill/>
+          <a:ln w="9525">
+            <a:solidFill>
+              <a:srgbClr val="000000">
+                <a:alpha val="5000"/>
+              </a:srgbClr>
+            </a:solidFill>
+            <a:prstDash val="solid"/>
+          </a:ln>
+        </p:spPr>
+      </p:sp>
+      <p:sp>
+        <p:nvSpPr>
+          <p:cNvPr id="46" name="Shape 44"/>
+          <p:cNvSpPr/>
+          <p:nvPr/>
+        </p:nvSpPr>
+        <p:spPr>
+          <a:xfrm>
+            <a:off x="0" y="4191000"/>
+            <a:ext cx="12191695" cy="0"/>
+          </a:xfrm>
+          <a:prstGeom prst="line">
+            <a:avLst/>
+          </a:prstGeom>
+          <a:noFill/>
+          <a:ln w="9525">
+            <a:solidFill>
+              <a:srgbClr val="000000">
+                <a:alpha val="5000"/>
+              </a:srgbClr>
+            </a:solidFill>
+            <a:prstDash val="solid"/>
+          </a:ln>
+        </p:spPr>
+      </p:sp>
+      <p:sp>
+        <p:nvSpPr>
+          <p:cNvPr id="47" name="Shape 45"/>
+          <p:cNvSpPr/>
+          <p:nvPr/>
+        </p:nvSpPr>
+        <p:spPr>
+          <a:xfrm>
+            <a:off x="0" y="4572000"/>
+            <a:ext cx="12191695" cy="0"/>
+          </a:xfrm>
+          <a:prstGeom prst="line">
+            <a:avLst/>
+          </a:prstGeom>
+          <a:noFill/>
+          <a:ln w="9525">
+            <a:solidFill>
+              <a:srgbClr val="000000">
+                <a:alpha val="5000"/>
+              </a:srgbClr>
+            </a:solidFill>
+            <a:prstDash val="solid"/>
+          </a:ln>
+        </p:spPr>
+      </p:sp>
+      <p:sp>
+        <p:nvSpPr>
+          <p:cNvPr id="48" name="Shape 46"/>
+          <p:cNvSpPr/>
+          <p:nvPr/>
+        </p:nvSpPr>
+        <p:spPr>
+          <a:xfrm>
+            <a:off x="0" y="4953000"/>
+            <a:ext cx="12191695" cy="0"/>
+          </a:xfrm>
+          <a:prstGeom prst="line">
+            <a:avLst/>
+          </a:prstGeom>
+          <a:noFill/>
+          <a:ln w="9525">
+            <a:solidFill>
+              <a:srgbClr val="000000">
+                <a:alpha val="5000"/>
+              </a:srgbClr>
+            </a:solidFill>
+            <a:prstDash val="solid"/>
+          </a:ln>
+        </p:spPr>
+      </p:sp>
+      <p:sp>
+        <p:nvSpPr>
+          <p:cNvPr id="49" name="Shape 47"/>
+          <p:cNvSpPr/>
+          <p:nvPr/>
+        </p:nvSpPr>
+        <p:spPr>
+          <a:xfrm>
+            <a:off x="0" y="5334000"/>
+            <a:ext cx="12191695" cy="0"/>
+          </a:xfrm>
+          <a:prstGeom prst="line">
+            <a:avLst/>
+          </a:prstGeom>
+          <a:noFill/>
+          <a:ln w="9525">
+            <a:solidFill>
+              <a:srgbClr val="000000">
+                <a:alpha val="5000"/>
+              </a:srgbClr>
+            </a:solidFill>
+            <a:prstDash val="solid"/>
+          </a:ln>
+        </p:spPr>
+      </p:sp>
+      <p:sp>
+        <p:nvSpPr>
+          <p:cNvPr id="50" name="Shape 48"/>
+          <p:cNvSpPr/>
+          <p:nvPr/>
+        </p:nvSpPr>
+        <p:spPr>
+          <a:xfrm>
+            <a:off x="0" y="5715000"/>
+            <a:ext cx="12191695" cy="0"/>
+          </a:xfrm>
+          <a:prstGeom prst="line">
+            <a:avLst/>
+          </a:prstGeom>
+          <a:noFill/>
+          <a:ln w="9525">
+            <a:solidFill>
+              <a:srgbClr val="000000">
+                <a:alpha val="5000"/>
+              </a:srgbClr>
+            </a:solidFill>
+            <a:prstDash val="solid"/>
+          </a:ln>
+        </p:spPr>
+      </p:sp>
+      <p:sp>
+        <p:nvSpPr>
+          <p:cNvPr id="51" name="Shape 49"/>
+          <p:cNvSpPr/>
+          <p:nvPr/>
+        </p:nvSpPr>
+        <p:spPr>
+          <a:xfrm>
+            <a:off x="0" y="6096000"/>
+            <a:ext cx="12191695" cy="0"/>
+          </a:xfrm>
+          <a:prstGeom prst="line">
+            <a:avLst/>
+          </a:prstGeom>
+          <a:noFill/>
+          <a:ln w="9525">
+            <a:solidFill>
+              <a:srgbClr val="000000">
+                <a:alpha val="5000"/>
+              </a:srgbClr>
+            </a:solidFill>
+            <a:prstDash val="solid"/>
+          </a:ln>
+        </p:spPr>
+      </p:sp>
+      <p:sp>
+        <p:nvSpPr>
+          <p:cNvPr id="52" name="Shape 50"/>
+          <p:cNvSpPr/>
+          <p:nvPr/>
+        </p:nvSpPr>
+        <p:spPr>
+          <a:xfrm>
+            <a:off x="0" y="6477000"/>
+            <a:ext cx="12191695" cy="0"/>
+          </a:xfrm>
+          <a:prstGeom prst="line">
+            <a:avLst/>
+          </a:prstGeom>
+          <a:noFill/>
+          <a:ln w="9525">
+            <a:solidFill>
+              <a:srgbClr val="000000">
+                <a:alpha val="5000"/>
+              </a:srgbClr>
+            </a:solidFill>
+            <a:prstDash val="solid"/>
+          </a:ln>
+        </p:spPr>
+      </p:sp>
+      <p:sp>
+        <p:nvSpPr>
+          <p:cNvPr id="53" name="Shape 51"/>
+          <p:cNvSpPr/>
+          <p:nvPr/>
+        </p:nvSpPr>
+        <p:spPr>
+          <a:xfrm>
+            <a:off x="0" y="6858000"/>
+            <a:ext cx="12191695" cy="0"/>
+          </a:xfrm>
+          <a:prstGeom prst="line">
+            <a:avLst/>
+          </a:prstGeom>
+          <a:noFill/>
+          <a:ln w="9525">
+            <a:solidFill>
+              <a:srgbClr val="000000">
+                <a:alpha val="5000"/>
+              </a:srgbClr>
+            </a:solidFill>
+            <a:prstDash val="solid"/>
+          </a:ln>
+        </p:spPr>
+      </p:sp>
+      <p:sp>
+        <p:nvSpPr>
+          <p:cNvPr id="54" name="Text 52"/>
           <p:cNvSpPr txBox="1"/>
           <p:nvPr/>
         </p:nvSpPr>
         <p:spPr>
           <a:xfrm>
-            <a:off x="0" y="571486"/>
-            <a:ext cx="12191695" cy="323842"/>
+            <a:off x="0" y="1463040"/>
+            <a:ext cx="12191695" cy="411480"/>
           </a:xfrm>
           <a:prstGeom prst="rect">
             <a:avLst/>
@@ -900,9 +2200,9 @@
               <a:buNone/>
             </a:pPr>
             <a:r>
-              <a:rPr lang="en-US" sz="1600" b="1" spc="300" kern="0" dirty="0">
+              <a:rPr lang="en-US" sz="2400" b="1" spc="500" kern="0" dirty="0">
                 <a:solidFill>
-                  <a:srgbClr val="E53935"/>
+                  <a:srgbClr val="8B1A1A"/>
                 </a:solidFill>
                 <a:latin typeface="Playfair Display" pitchFamily="34" charset="0"/>
                 <a:ea typeface="Playfair Display" pitchFamily="34" charset="-122"/>
@@ -910,20 +2210,20 @@
               </a:rPr>
               <a:t>REDGRID</a:t>
             </a:r>
-            <a:endParaRPr lang="en-US" sz="1600" dirty="0"/>
+            <a:endParaRPr lang="en-US" sz="2400" dirty="0"/>
           </a:p>
         </p:txBody>
       </p:sp>
       <p:sp>
         <p:nvSpPr>
-          <p:cNvPr id="3" name="Text 1"/>
+          <p:cNvPr id="55" name="Text 53"/>
           <p:cNvSpPr txBox="1"/>
           <p:nvPr/>
         </p:nvSpPr>
         <p:spPr>
           <a:xfrm>
-            <a:off x="0" y="895328"/>
-            <a:ext cx="12191695" cy="1066773"/>
+            <a:off x="0" y="1874520"/>
+            <a:ext cx="12191695" cy="1234440"/>
           </a:xfrm>
           <a:prstGeom prst="rect">
             <a:avLst/>
@@ -939,30 +2239,30 @@
               <a:buNone/>
             </a:pPr>
             <a:r>
-              <a:rPr lang="en-US" sz="8000" b="1" dirty="0">
+              <a:rPr lang="en-US" sz="8200" b="1" spc="-100" kern="0" dirty="0">
                 <a:solidFill>
-                  <a:srgbClr val="F7F4EF"/>
+                  <a:srgbClr val="1A1A2E"/>
                 </a:solidFill>
-                <a:latin typeface="Source Sans Pro" pitchFamily="34" charset="0"/>
-                <a:ea typeface="Source Sans Pro" pitchFamily="34" charset="-122"/>
-                <a:cs typeface="Source Sans Pro" pitchFamily="34" charset="-120"/>
+                <a:latin typeface="Source Sans 3" pitchFamily="34" charset="0"/>
+                <a:ea typeface="Source Sans 3" pitchFamily="34" charset="-122"/>
+                <a:cs typeface="Source Sans 3" pitchFamily="34" charset="-120"/>
               </a:rPr>
               <a:t>Thank You</a:t>
             </a:r>
-            <a:endParaRPr lang="en-US" sz="8000" dirty="0"/>
+            <a:endParaRPr lang="en-US" sz="8200" dirty="0"/>
           </a:p>
         </p:txBody>
       </p:sp>
       <p:sp>
         <p:nvSpPr>
-          <p:cNvPr id="4" name="Text 2"/>
+          <p:cNvPr id="56" name="Text 54"/>
           <p:cNvSpPr txBox="1"/>
           <p:nvPr/>
         </p:nvSpPr>
         <p:spPr>
           <a:xfrm>
-            <a:off x="0" y="1962101"/>
-            <a:ext cx="12191695" cy="190495"/>
+            <a:off x="0" y="3108960"/>
+            <a:ext cx="12191695" cy="256032"/>
           </a:xfrm>
           <a:prstGeom prst="rect">
             <a:avLst/>
@@ -978,849 +2278,15 @@
               <a:buNone/>
             </a:pPr>
             <a:r>
-              <a:rPr lang="en-US" sz="1100" b="1" spc="300" kern="0" dirty="0">
+              <a:rPr lang="en-US" sz="1050" b="1" spc="300" kern="0" dirty="0">
                 <a:solidFill>
-                  <a:srgbClr val="A0631A"/>
+                  <a:srgbClr val="8B1A1A"/>
                 </a:solidFill>
-                <a:latin typeface="Courier New" pitchFamily="34" charset="0"/>
-                <a:ea typeface="Courier New" pitchFamily="34" charset="-122"/>
-                <a:cs typeface="Courier New" pitchFamily="34" charset="-120"/>
+                <a:latin typeface="IBM Plex Mono" pitchFamily="34" charset="0"/>
+                <a:ea typeface="IBM Plex Mono" pitchFamily="34" charset="-122"/>
+                <a:cs typeface="IBM Plex Mono" pitchFamily="34" charset="-120"/>
               </a:rPr>
               <a:t>FLOOR OPEN FOR QUESTIONS</a:t>
-            </a:r>
-            <a:endParaRPr lang="en-US" sz="1100" dirty="0"/>
-          </a:p>
-        </p:txBody>
-      </p:sp>
-      <p:sp>
-        <p:nvSpPr>
-          <p:cNvPr id="5" name="Shape 3"/>
-          <p:cNvSpPr/>
-          <p:nvPr/>
-        </p:nvSpPr>
-        <p:spPr>
-          <a:xfrm>
-            <a:off x="761981" y="2343091"/>
-            <a:ext cx="10667733" cy="0"/>
-          </a:xfrm>
-          <a:prstGeom prst="line">
-            <a:avLst/>
-          </a:prstGeom>
-          <a:noFill/>
-          <a:ln w="9525">
-            <a:solidFill>
-              <a:srgbClr val="FFFFFF">
-                <a:alpha val="8000"/>
-              </a:srgbClr>
-            </a:solidFill>
-            <a:prstDash val="solid"/>
-          </a:ln>
-        </p:spPr>
-      </p:sp>
-      <p:sp>
-        <p:nvSpPr>
-          <p:cNvPr id="6" name="Shape 4"/>
-          <p:cNvSpPr/>
-          <p:nvPr/>
-        </p:nvSpPr>
-        <p:spPr>
-          <a:xfrm>
-            <a:off x="761981" y="2533587"/>
-            <a:ext cx="2495488" cy="1028674"/>
-          </a:xfrm>
-          <a:prstGeom prst="roundRect">
-            <a:avLst>
-              <a:gd name="adj" fmla="val 5333"/>
-            </a:avLst>
-          </a:prstGeom>
-          <a:solidFill>
-            <a:srgbClr val="FFFFFF">
-              <a:alpha val="4000"/>
-            </a:srgbClr>
-          </a:solidFill>
-          <a:ln w="9525">
-            <a:solidFill>
-              <a:srgbClr val="FFFFFF">
-                <a:alpha val="8000"/>
-              </a:srgbClr>
-            </a:solidFill>
-            <a:prstDash val="solid"/>
-          </a:ln>
-        </p:spPr>
-      </p:sp>
-      <p:sp>
-        <p:nvSpPr>
-          <p:cNvPr id="7" name="Shape 5"/>
-          <p:cNvSpPr/>
-          <p:nvPr/>
-        </p:nvSpPr>
-        <p:spPr>
-          <a:xfrm>
-            <a:off x="871709" y="2685983"/>
-            <a:ext cx="304792" cy="304792"/>
-          </a:xfrm>
-          <a:prstGeom prst="roundRect">
-            <a:avLst>
-              <a:gd name="adj" fmla="val 13500"/>
-            </a:avLst>
-          </a:prstGeom>
-          <a:solidFill>
-            <a:srgbClr val="FFFFFF">
-              <a:alpha val="5000"/>
-            </a:srgbClr>
-          </a:solidFill>
-          <a:ln/>
-        </p:spPr>
-      </p:sp>
-      <p:pic>
-        <p:nvPicPr>
-          <p:cNvPr id="8" name="Image 0" descr="/home/claude/pptx/icons/doc_w.png">    </p:cNvPr>
-          <p:cNvPicPr>
-            <a:picLocks noChangeAspect="1"/>
-          </p:cNvPicPr>
-          <p:nvPr/>
-        </p:nvPicPr>
-        <p:blipFill>
-          <a:blip r:embed="rId1"/>
-          <a:stretch>
-            <a:fillRect/>
-          </a:stretch>
-        </p:blipFill>
-        <p:spPr>
-          <a:xfrm>
-            <a:off x="938382" y="2752656"/>
-            <a:ext cx="171446" cy="171446"/>
-          </a:xfrm>
-          <a:prstGeom prst="rect">
-            <a:avLst/>
-          </a:prstGeom>
-        </p:spPr>
-      </p:pic>
-      <p:sp>
-        <p:nvSpPr>
-          <p:cNvPr id="9" name="Text 6"/>
-          <p:cNvSpPr txBox="1"/>
-          <p:nvPr/>
-        </p:nvSpPr>
-        <p:spPr>
-          <a:xfrm>
-            <a:off x="871709" y="2685983"/>
-            <a:ext cx="2276032" cy="361941"/>
-          </a:xfrm>
-          <a:prstGeom prst="rect">
-            <a:avLst/>
-          </a:prstGeom>
-          <a:noFill/>
-          <a:ln/>
-        </p:spPr>
-        <p:txBody>
-          <a:bodyPr wrap="square" lIns="0" tIns="0" rIns="0" bIns="0" rtlCol="0" anchor="t"/>
-          <a:lstStyle/>
-          <a:p>
-            <a:pPr algn="r" indent="0" marL="0">
-              <a:buNone/>
-            </a:pPr>
-            <a:r>
-              <a:rPr lang="en-US" sz="2600" b="1" dirty="0">
-                <a:solidFill>
-                  <a:srgbClr val="F7F4EF"/>
-                </a:solidFill>
-                <a:latin typeface="Playfair Display" pitchFamily="34" charset="0"/>
-                <a:ea typeface="Playfair Display" pitchFamily="34" charset="-122"/>
-                <a:cs typeface="Playfair Display" pitchFamily="34" charset="-120"/>
-              </a:rPr>
-              <a:t>11</a:t>
-            </a:r>
-            <a:endParaRPr lang="en-US" sz="2600" dirty="0"/>
-          </a:p>
-        </p:txBody>
-      </p:sp>
-      <p:sp>
-        <p:nvSpPr>
-          <p:cNvPr id="10" name="Text 7"/>
-          <p:cNvSpPr txBox="1"/>
-          <p:nvPr/>
-        </p:nvSpPr>
-        <p:spPr>
-          <a:xfrm>
-            <a:off x="871709" y="3200320"/>
-            <a:ext cx="2276032" cy="304792"/>
-          </a:xfrm>
-          <a:prstGeom prst="rect">
-            <a:avLst/>
-          </a:prstGeom>
-          <a:noFill/>
-          <a:ln/>
-        </p:spPr>
-        <p:txBody>
-          <a:bodyPr wrap="square" lIns="0" tIns="0" rIns="0" bIns="0" rtlCol="0" anchor="t"/>
-          <a:lstStyle/>
-          <a:p>
-            <a:pPr algn="r" indent="0" marL="0">
-              <a:buNone/>
-            </a:pPr>
-            <a:r>
-              <a:rPr lang="en-US" sz="750" b="1" spc="50" kern="0" dirty="0">
-                <a:solidFill>
-                  <a:srgbClr val="8C8C99"/>
-                </a:solidFill>
-                <a:latin typeface="Source Sans Pro" pitchFamily="34" charset="0"/>
-                <a:ea typeface="Source Sans Pro" pitchFamily="34" charset="-122"/>
-                <a:cs typeface="Source Sans Pro" pitchFamily="34" charset="-120"/>
-              </a:rPr>
-              <a:t>PAPERS SURVEYED</a:t>
-            </a:r>
-            <a:endParaRPr lang="en-US" sz="750" dirty="0"/>
-          </a:p>
-        </p:txBody>
-      </p:sp>
-      <p:sp>
-        <p:nvSpPr>
-          <p:cNvPr id="11" name="Shape 8"/>
-          <p:cNvSpPr/>
-          <p:nvPr/>
-        </p:nvSpPr>
-        <p:spPr>
-          <a:xfrm>
-            <a:off x="3486063" y="2533587"/>
-            <a:ext cx="2495488" cy="1028674"/>
-          </a:xfrm>
-          <a:prstGeom prst="roundRect">
-            <a:avLst>
-              <a:gd name="adj" fmla="val 5333"/>
-            </a:avLst>
-          </a:prstGeom>
-          <a:solidFill>
-            <a:srgbClr val="FFFFFF">
-              <a:alpha val="4000"/>
-            </a:srgbClr>
-          </a:solidFill>
-          <a:ln w="9525">
-            <a:solidFill>
-              <a:srgbClr val="FFFFFF">
-                <a:alpha val="8000"/>
-              </a:srgbClr>
-            </a:solidFill>
-            <a:prstDash val="solid"/>
-          </a:ln>
-        </p:spPr>
-      </p:sp>
-      <p:sp>
-        <p:nvSpPr>
-          <p:cNvPr id="12" name="Shape 9"/>
-          <p:cNvSpPr/>
-          <p:nvPr/>
-        </p:nvSpPr>
-        <p:spPr>
-          <a:xfrm>
-            <a:off x="3595791" y="2685983"/>
-            <a:ext cx="304792" cy="304792"/>
-          </a:xfrm>
-          <a:prstGeom prst="roundRect">
-            <a:avLst>
-              <a:gd name="adj" fmla="val 13500"/>
-            </a:avLst>
-          </a:prstGeom>
-          <a:solidFill>
-            <a:srgbClr val="FFFFFF">
-              <a:alpha val="5000"/>
-            </a:srgbClr>
-          </a:solidFill>
-          <a:ln/>
-        </p:spPr>
-      </p:sp>
-      <p:pic>
-        <p:nvPicPr>
-          <p:cNvPr id="13" name="Image 1" descr="/home/claude/pptx/icons/diverge_w.png">    </p:cNvPr>
-          <p:cNvPicPr>
-            <a:picLocks noChangeAspect="1"/>
-          </p:cNvPicPr>
-          <p:nvPr/>
-        </p:nvPicPr>
-        <p:blipFill>
-          <a:blip r:embed="rId2"/>
-          <a:stretch>
-            <a:fillRect/>
-          </a:stretch>
-        </p:blipFill>
-        <p:spPr>
-          <a:xfrm>
-            <a:off x="3662464" y="2752656"/>
-            <a:ext cx="171446" cy="171446"/>
-          </a:xfrm>
-          <a:prstGeom prst="rect">
-            <a:avLst/>
-          </a:prstGeom>
-        </p:spPr>
-      </p:pic>
-      <p:sp>
-        <p:nvSpPr>
-          <p:cNvPr id="14" name="Text 10"/>
-          <p:cNvSpPr txBox="1"/>
-          <p:nvPr/>
-        </p:nvSpPr>
-        <p:spPr>
-          <a:xfrm>
-            <a:off x="3595791" y="2685983"/>
-            <a:ext cx="2276032" cy="361941"/>
-          </a:xfrm>
-          <a:prstGeom prst="rect">
-            <a:avLst/>
-          </a:prstGeom>
-          <a:noFill/>
-          <a:ln/>
-        </p:spPr>
-        <p:txBody>
-          <a:bodyPr wrap="square" lIns="0" tIns="0" rIns="0" bIns="0" rtlCol="0" anchor="t"/>
-          <a:lstStyle/>
-          <a:p>
-            <a:pPr algn="r" indent="0" marL="0">
-              <a:buNone/>
-            </a:pPr>
-            <a:r>
-              <a:rPr lang="en-US" sz="2600" b="1" dirty="0">
-                <a:solidFill>
-                  <a:srgbClr val="F7F4EF"/>
-                </a:solidFill>
-                <a:latin typeface="Playfair Display" pitchFamily="34" charset="0"/>
-                <a:ea typeface="Playfair Display" pitchFamily="34" charset="-122"/>
-                <a:cs typeface="Playfair Display" pitchFamily="34" charset="-120"/>
-              </a:rPr>
-              <a:t>3</a:t>
-            </a:r>
-            <a:endParaRPr lang="en-US" sz="2600" dirty="0"/>
-          </a:p>
-        </p:txBody>
-      </p:sp>
-      <p:sp>
-        <p:nvSpPr>
-          <p:cNvPr id="15" name="Text 11"/>
-          <p:cNvSpPr txBox="1"/>
-          <p:nvPr/>
-        </p:nvSpPr>
-        <p:spPr>
-          <a:xfrm>
-            <a:off x="3595791" y="3200320"/>
-            <a:ext cx="2276032" cy="304792"/>
-          </a:xfrm>
-          <a:prstGeom prst="rect">
-            <a:avLst/>
-          </a:prstGeom>
-          <a:noFill/>
-          <a:ln/>
-        </p:spPr>
-        <p:txBody>
-          <a:bodyPr wrap="square" lIns="0" tIns="0" rIns="0" bIns="0" rtlCol="0" anchor="t"/>
-          <a:lstStyle/>
-          <a:p>
-            <a:pPr algn="r" indent="0" marL="0">
-              <a:buNone/>
-            </a:pPr>
-            <a:r>
-              <a:rPr lang="en-US" sz="750" b="1" spc="50" kern="0" dirty="0">
-                <a:solidFill>
-                  <a:srgbClr val="8C8C99"/>
-                </a:solidFill>
-                <a:latin typeface="Source Sans Pro" pitchFamily="34" charset="0"/>
-                <a:ea typeface="Source Sans Pro" pitchFamily="34" charset="-122"/>
-                <a:cs typeface="Source Sans Pro" pitchFamily="34" charset="-120"/>
-              </a:rPr>
-              <a:t>CONTRIBUTION DIRECTIONS</a:t>
-            </a:r>
-            <a:endParaRPr lang="en-US" sz="750" dirty="0"/>
-          </a:p>
-        </p:txBody>
-      </p:sp>
-      <p:sp>
-        <p:nvSpPr>
-          <p:cNvPr id="16" name="Shape 12"/>
-          <p:cNvSpPr/>
-          <p:nvPr/>
-        </p:nvSpPr>
-        <p:spPr>
-          <a:xfrm>
-            <a:off x="6210145" y="2533587"/>
-            <a:ext cx="2495488" cy="1028674"/>
-          </a:xfrm>
-          <a:prstGeom prst="roundRect">
-            <a:avLst>
-              <a:gd name="adj" fmla="val 5333"/>
-            </a:avLst>
-          </a:prstGeom>
-          <a:solidFill>
-            <a:srgbClr val="FFFFFF">
-              <a:alpha val="4000"/>
-            </a:srgbClr>
-          </a:solidFill>
-          <a:ln w="9525">
-            <a:solidFill>
-              <a:srgbClr val="FFFFFF">
-                <a:alpha val="8000"/>
-              </a:srgbClr>
-            </a:solidFill>
-            <a:prstDash val="solid"/>
-          </a:ln>
-        </p:spPr>
-      </p:sp>
-      <p:sp>
-        <p:nvSpPr>
-          <p:cNvPr id="17" name="Shape 13"/>
-          <p:cNvSpPr/>
-          <p:nvPr/>
-        </p:nvSpPr>
-        <p:spPr>
-          <a:xfrm>
-            <a:off x="6319873" y="2685983"/>
-            <a:ext cx="304792" cy="304792"/>
-          </a:xfrm>
-          <a:prstGeom prst="roundRect">
-            <a:avLst>
-              <a:gd name="adj" fmla="val 13500"/>
-            </a:avLst>
-          </a:prstGeom>
-          <a:solidFill>
-            <a:srgbClr val="FFFFFF">
-              <a:alpha val="5000"/>
-            </a:srgbClr>
-          </a:solidFill>
-          <a:ln/>
-        </p:spPr>
-      </p:sp>
-      <p:pic>
-        <p:nvPicPr>
-          <p:cNvPr id="18" name="Image 2" descr="/home/claude/pptx/icons/target_w.png">    </p:cNvPr>
-          <p:cNvPicPr>
-            <a:picLocks noChangeAspect="1"/>
-          </p:cNvPicPr>
-          <p:nvPr/>
-        </p:nvPicPr>
-        <p:blipFill>
-          <a:blip r:embed="rId3"/>
-          <a:stretch>
-            <a:fillRect/>
-          </a:stretch>
-        </p:blipFill>
-        <p:spPr>
-          <a:xfrm>
-            <a:off x="6386546" y="2752656"/>
-            <a:ext cx="171446" cy="171446"/>
-          </a:xfrm>
-          <a:prstGeom prst="rect">
-            <a:avLst/>
-          </a:prstGeom>
-        </p:spPr>
-      </p:pic>
-      <p:sp>
-        <p:nvSpPr>
-          <p:cNvPr id="19" name="Text 14"/>
-          <p:cNvSpPr txBox="1"/>
-          <p:nvPr/>
-        </p:nvSpPr>
-        <p:spPr>
-          <a:xfrm>
-            <a:off x="6319873" y="2685983"/>
-            <a:ext cx="2276032" cy="361941"/>
-          </a:xfrm>
-          <a:prstGeom prst="rect">
-            <a:avLst/>
-          </a:prstGeom>
-          <a:noFill/>
-          <a:ln/>
-        </p:spPr>
-        <p:txBody>
-          <a:bodyPr wrap="square" lIns="0" tIns="0" rIns="0" bIns="0" rtlCol="0" anchor="t"/>
-          <a:lstStyle/>
-          <a:p>
-            <a:pPr algn="r" indent="0" marL="0">
-              <a:buNone/>
-            </a:pPr>
-            <a:r>
-              <a:rPr lang="en-US" sz="2600" b="1" dirty="0">
-                <a:solidFill>
-                  <a:srgbClr val="F7F4EF"/>
-                </a:solidFill>
-                <a:latin typeface="Playfair Display" pitchFamily="34" charset="0"/>
-                <a:ea typeface="Playfair Display" pitchFamily="34" charset="-122"/>
-                <a:cs typeface="Playfair Display" pitchFamily="34" charset="-120"/>
-              </a:rPr>
-              <a:t>3</a:t>
-            </a:r>
-            <a:endParaRPr lang="en-US" sz="2600" dirty="0"/>
-          </a:p>
-        </p:txBody>
-      </p:sp>
-      <p:sp>
-        <p:nvSpPr>
-          <p:cNvPr id="20" name="Text 15"/>
-          <p:cNvSpPr txBox="1"/>
-          <p:nvPr/>
-        </p:nvSpPr>
-        <p:spPr>
-          <a:xfrm>
-            <a:off x="6319873" y="3200320"/>
-            <a:ext cx="2276032" cy="304792"/>
-          </a:xfrm>
-          <a:prstGeom prst="rect">
-            <a:avLst/>
-          </a:prstGeom>
-          <a:noFill/>
-          <a:ln/>
-        </p:spPr>
-        <p:txBody>
-          <a:bodyPr wrap="square" lIns="0" tIns="0" rIns="0" bIns="0" rtlCol="0" anchor="t"/>
-          <a:lstStyle/>
-          <a:p>
-            <a:pPr algn="r" indent="0" marL="0">
-              <a:buNone/>
-            </a:pPr>
-            <a:r>
-              <a:rPr lang="en-US" sz="750" b="1" spc="50" kern="0" dirty="0">
-                <a:solidFill>
-                  <a:srgbClr val="8C8C99"/>
-                </a:solidFill>
-                <a:latin typeface="Source Sans Pro" pitchFamily="34" charset="0"/>
-                <a:ea typeface="Source Sans Pro" pitchFamily="34" charset="-122"/>
-                <a:cs typeface="Source Sans Pro" pitchFamily="34" charset="-120"/>
-              </a:rPr>
-              <a:t>ATTACK SURFACES FOR EVALUATION</a:t>
-            </a:r>
-            <a:endParaRPr lang="en-US" sz="750" dirty="0"/>
-          </a:p>
-        </p:txBody>
-      </p:sp>
-      <p:sp>
-        <p:nvSpPr>
-          <p:cNvPr id="21" name="Shape 16"/>
-          <p:cNvSpPr/>
-          <p:nvPr/>
-        </p:nvSpPr>
-        <p:spPr>
-          <a:xfrm>
-            <a:off x="8934227" y="2533587"/>
-            <a:ext cx="2495488" cy="1028674"/>
-          </a:xfrm>
-          <a:prstGeom prst="roundRect">
-            <a:avLst>
-              <a:gd name="adj" fmla="val 5333"/>
-            </a:avLst>
-          </a:prstGeom>
-          <a:solidFill>
-            <a:srgbClr val="FFFFFF">
-              <a:alpha val="4000"/>
-            </a:srgbClr>
-          </a:solidFill>
-          <a:ln w="9525">
-            <a:solidFill>
-              <a:srgbClr val="FFFFFF">
-                <a:alpha val="8000"/>
-              </a:srgbClr>
-            </a:solidFill>
-            <a:prstDash val="solid"/>
-          </a:ln>
-        </p:spPr>
-      </p:sp>
-      <p:sp>
-        <p:nvSpPr>
-          <p:cNvPr id="22" name="Shape 17"/>
-          <p:cNvSpPr/>
-          <p:nvPr/>
-        </p:nvSpPr>
-        <p:spPr>
-          <a:xfrm>
-            <a:off x="9043955" y="2685983"/>
-            <a:ext cx="304792" cy="304792"/>
-          </a:xfrm>
-          <a:prstGeom prst="roundRect">
-            <a:avLst>
-              <a:gd name="adj" fmla="val 13500"/>
-            </a:avLst>
-          </a:prstGeom>
-          <a:solidFill>
-            <a:srgbClr val="FFFFFF">
-              <a:alpha val="5000"/>
-            </a:srgbClr>
-          </a:solidFill>
-          <a:ln/>
-        </p:spPr>
-      </p:sp>
-      <p:pic>
-        <p:nvPicPr>
-          <p:cNvPr id="23" name="Image 3" descr="/home/claude/pptx/icons/warn_w.png">    </p:cNvPr>
-          <p:cNvPicPr>
-            <a:picLocks noChangeAspect="1"/>
-          </p:cNvPicPr>
-          <p:nvPr/>
-        </p:nvPicPr>
-        <p:blipFill>
-          <a:blip r:embed="rId4"/>
-          <a:stretch>
-            <a:fillRect/>
-          </a:stretch>
-        </p:blipFill>
-        <p:spPr>
-          <a:xfrm>
-            <a:off x="9110628" y="2752656"/>
-            <a:ext cx="171446" cy="171446"/>
-          </a:xfrm>
-          <a:prstGeom prst="rect">
-            <a:avLst/>
-          </a:prstGeom>
-        </p:spPr>
-      </p:pic>
-      <p:sp>
-        <p:nvSpPr>
-          <p:cNvPr id="24" name="Text 18"/>
-          <p:cNvSpPr txBox="1"/>
-          <p:nvPr/>
-        </p:nvSpPr>
-        <p:spPr>
-          <a:xfrm>
-            <a:off x="9043955" y="2685983"/>
-            <a:ext cx="2276032" cy="361941"/>
-          </a:xfrm>
-          <a:prstGeom prst="rect">
-            <a:avLst/>
-          </a:prstGeom>
-          <a:noFill/>
-          <a:ln/>
-        </p:spPr>
-        <p:txBody>
-          <a:bodyPr wrap="square" lIns="0" tIns="0" rIns="0" bIns="0" rtlCol="0" anchor="t"/>
-          <a:lstStyle/>
-          <a:p>
-            <a:pPr algn="r" indent="0" marL="0">
-              <a:buNone/>
-            </a:pPr>
-            <a:r>
-              <a:rPr lang="en-US" sz="2600" b="1" dirty="0">
-                <a:solidFill>
-                  <a:srgbClr val="F7F4EF"/>
-                </a:solidFill>
-                <a:latin typeface="Playfair Display" pitchFamily="34" charset="0"/>
-                <a:ea typeface="Playfair Display" pitchFamily="34" charset="-122"/>
-                <a:cs typeface="Playfair Display" pitchFamily="34" charset="-120"/>
-              </a:rPr>
-              <a:t>40</a:t>
-            </a:r>
-            <a:endParaRPr lang="en-US" sz="2600" dirty="0"/>
-          </a:p>
-        </p:txBody>
-      </p:sp>
-      <p:sp>
-        <p:nvSpPr>
-          <p:cNvPr id="25" name="Text 19"/>
-          <p:cNvSpPr txBox="1"/>
-          <p:nvPr/>
-        </p:nvSpPr>
-        <p:spPr>
-          <a:xfrm>
-            <a:off x="9043955" y="3200320"/>
-            <a:ext cx="2276032" cy="304792"/>
-          </a:xfrm>
-          <a:prstGeom prst="rect">
-            <a:avLst/>
-          </a:prstGeom>
-          <a:noFill/>
-          <a:ln/>
-        </p:spPr>
-        <p:txBody>
-          <a:bodyPr wrap="square" lIns="0" tIns="0" rIns="0" bIns="0" rtlCol="0" anchor="t"/>
-          <a:lstStyle/>
-          <a:p>
-            <a:pPr algn="r" indent="0" marL="0">
-              <a:buNone/>
-            </a:pPr>
-            <a:r>
-              <a:rPr lang="en-US" sz="750" b="1" spc="50" kern="0" dirty="0">
-                <a:solidFill>
-                  <a:srgbClr val="8C8C99"/>
-                </a:solidFill>
-                <a:latin typeface="Source Sans Pro" pitchFamily="34" charset="0"/>
-                <a:ea typeface="Source Sans Pro" pitchFamily="34" charset="-122"/>
-                <a:cs typeface="Source Sans Pro" pitchFamily="34" charset="-120"/>
-              </a:rPr>
-              <a:t>CVES IN PRIMARY BENCHMARK</a:t>
-            </a:r>
-            <a:endParaRPr lang="en-US" sz="750" dirty="0"/>
-          </a:p>
-        </p:txBody>
-      </p:sp>
-      <p:sp>
-        <p:nvSpPr>
-          <p:cNvPr id="26" name="Shape 20"/>
-          <p:cNvSpPr/>
-          <p:nvPr/>
-        </p:nvSpPr>
-        <p:spPr>
-          <a:xfrm>
-            <a:off x="761981" y="3905152"/>
-            <a:ext cx="3403515" cy="857229"/>
-          </a:xfrm>
-          <a:prstGeom prst="roundRect">
-            <a:avLst>
-              <a:gd name="adj" fmla="val 4267"/>
-            </a:avLst>
-          </a:prstGeom>
-          <a:solidFill>
-            <a:srgbClr val="A0631A">
-              <a:alpha val="8000"/>
-            </a:srgbClr>
-          </a:solidFill>
-          <a:ln w="12700">
-            <a:solidFill>
-              <a:srgbClr val="A0631A">
-                <a:alpha val="15000"/>
-              </a:srgbClr>
-            </a:solidFill>
-            <a:prstDash val="solid"/>
-          </a:ln>
-        </p:spPr>
-      </p:sp>
-      <p:sp>
-        <p:nvSpPr>
-          <p:cNvPr id="27" name="Shape 21"/>
-          <p:cNvSpPr/>
-          <p:nvPr/>
-        </p:nvSpPr>
-        <p:spPr>
-          <a:xfrm>
-            <a:off x="761981" y="3905152"/>
-            <a:ext cx="0" cy="857229"/>
-          </a:xfrm>
-          <a:prstGeom prst="line">
-            <a:avLst/>
-          </a:prstGeom>
-          <a:noFill/>
-          <a:ln w="28575">
-            <a:solidFill>
-              <a:srgbClr val="A0631A"/>
-            </a:solidFill>
-            <a:prstDash val="solid"/>
-          </a:ln>
-        </p:spPr>
-      </p:sp>
-      <p:sp>
-        <p:nvSpPr>
-          <p:cNvPr id="28" name="Shape 22"/>
-          <p:cNvSpPr/>
-          <p:nvPr/>
-        </p:nvSpPr>
-        <p:spPr>
-          <a:xfrm>
-            <a:off x="908285" y="3996592"/>
-            <a:ext cx="380990" cy="380990"/>
-          </a:xfrm>
-          <a:prstGeom prst="ellipse">
-            <a:avLst/>
-          </a:prstGeom>
-          <a:solidFill>
-            <a:srgbClr val="A0631A">
-              <a:alpha val="15000"/>
-            </a:srgbClr>
-          </a:solidFill>
-          <a:ln/>
-        </p:spPr>
-      </p:sp>
-      <p:pic>
-        <p:nvPicPr>
-          <p:cNvPr id="29" name="Image 4" descr="/home/claude/pptx/icons/share_o.png">    </p:cNvPr>
-          <p:cNvPicPr>
-            <a:picLocks noChangeAspect="1"/>
-          </p:cNvPicPr>
-          <p:nvPr/>
-        </p:nvPicPr>
-        <p:blipFill>
-          <a:blip r:embed="rId5"/>
-          <a:stretch>
-            <a:fillRect/>
-          </a:stretch>
-        </p:blipFill>
-        <p:spPr>
-          <a:xfrm>
-            <a:off x="994008" y="4082315"/>
-            <a:ext cx="209545" cy="209545"/>
-          </a:xfrm>
-          <a:prstGeom prst="rect">
-            <a:avLst/>
-          </a:prstGeom>
-        </p:spPr>
-      </p:pic>
-      <p:sp>
-        <p:nvSpPr>
-          <p:cNvPr id="30" name="Text 23"/>
-          <p:cNvSpPr txBox="1"/>
-          <p:nvPr/>
-        </p:nvSpPr>
-        <p:spPr>
-          <a:xfrm>
-            <a:off x="1417291" y="3978304"/>
-            <a:ext cx="2620188" cy="228594"/>
-          </a:xfrm>
-          <a:prstGeom prst="rect">
-            <a:avLst/>
-          </a:prstGeom>
-          <a:noFill/>
-          <a:ln/>
-        </p:spPr>
-        <p:txBody>
-          <a:bodyPr wrap="square" lIns="0" tIns="0" rIns="0" bIns="0" rtlCol="0" anchor="t"/>
-          <a:lstStyle/>
-          <a:p>
-            <a:pPr indent="0" marL="0">
-              <a:buNone/>
-            </a:pPr>
-            <a:r>
-              <a:rPr lang="en-US" sz="1400" b="1" dirty="0">
-                <a:solidFill>
-                  <a:srgbClr val="A0631A"/>
-                </a:solidFill>
-                <a:latin typeface="Courier New" pitchFamily="34" charset="0"/>
-                <a:ea typeface="Courier New" pitchFamily="34" charset="-122"/>
-                <a:cs typeface="Courier New" pitchFamily="34" charset="-120"/>
-              </a:rPr>
-              <a:t>VDG</a:t>
-            </a:r>
-            <a:endParaRPr lang="en-US" sz="1400" dirty="0"/>
-          </a:p>
-        </p:txBody>
-      </p:sp>
-      <p:sp>
-        <p:nvSpPr>
-          <p:cNvPr id="31" name="Text 24"/>
-          <p:cNvSpPr txBox="1"/>
-          <p:nvPr/>
-        </p:nvSpPr>
-        <p:spPr>
-          <a:xfrm>
-            <a:off x="1417291" y="4267093"/>
-            <a:ext cx="2620188" cy="476238"/>
-          </a:xfrm>
-          <a:prstGeom prst="rect">
-            <a:avLst/>
-          </a:prstGeom>
-          <a:noFill/>
-          <a:ln/>
-        </p:spPr>
-        <p:txBody>
-          <a:bodyPr wrap="square" lIns="0" tIns="0" rIns="0" bIns="0" rtlCol="0" anchor="t"/>
-          <a:lstStyle/>
-          <a:p>
-            <a:pPr indent="0" marL="0">
-              <a:lnSpc>
-                <a:spcPct val="115000"/>
-              </a:lnSpc>
-              <a:buNone/>
-            </a:pPr>
-            <a:r>
-              <a:rPr lang="en-US" sz="1050" dirty="0">
-                <a:solidFill>
-                  <a:srgbClr val="D9D9DE"/>
-                </a:solidFill>
-                <a:latin typeface="Source Sans Pro" pitchFamily="34" charset="0"/>
-                <a:ea typeface="Source Sans Pro" pitchFamily="34" charset="-122"/>
-                <a:cs typeface="Source Sans Pro" pitchFamily="34" charset="-120"/>
-              </a:rPr>
-              <a:t>Vulnerability Dependency Graph: The graph we plan to build</a:t>
             </a:r>
             <a:endParaRPr lang="en-US" sz="1050" dirty="0"/>
           </a:p>
@@ -1828,399 +2294,65 @@
       </p:sp>
       <p:sp>
         <p:nvSpPr>
-          <p:cNvPr id="32" name="Shape 25"/>
-          <p:cNvSpPr/>
-          <p:nvPr/>
-        </p:nvSpPr>
-        <p:spPr>
-          <a:xfrm>
-            <a:off x="4394090" y="3905152"/>
-            <a:ext cx="3403515" cy="857229"/>
+          <p:cNvPr id="57" name="Shape 55"/>
+          <p:cNvSpPr/>
+          <p:nvPr/>
+        </p:nvSpPr>
+        <p:spPr>
+          <a:xfrm>
+            <a:off x="761695" y="5074920"/>
+            <a:ext cx="6766560" cy="1207008"/>
           </a:xfrm>
           <a:prstGeom prst="roundRect">
             <a:avLst>
-              <a:gd name="adj" fmla="val 4267"/>
+              <a:gd name="adj" fmla="val 7576"/>
             </a:avLst>
           </a:prstGeom>
           <a:solidFill>
-            <a:srgbClr val="A0631A">
-              <a:alpha val="8000"/>
-            </a:srgbClr>
-          </a:solidFill>
-          <a:ln w="12700">
-            <a:solidFill>
-              <a:srgbClr val="A0631A">
-                <a:alpha val="15000"/>
-              </a:srgbClr>
-            </a:solidFill>
-            <a:prstDash val="solid"/>
-          </a:ln>
-        </p:spPr>
-      </p:sp>
-      <p:sp>
-        <p:nvSpPr>
-          <p:cNvPr id="33" name="Shape 26"/>
-          <p:cNvSpPr/>
-          <p:nvPr/>
-        </p:nvSpPr>
-        <p:spPr>
-          <a:xfrm>
-            <a:off x="4394090" y="3905152"/>
-            <a:ext cx="0" cy="857229"/>
-          </a:xfrm>
-          <a:prstGeom prst="line">
-            <a:avLst/>
-          </a:prstGeom>
-          <a:noFill/>
-          <a:ln w="28575">
-            <a:solidFill>
-              <a:srgbClr val="A0631A"/>
-            </a:solidFill>
-            <a:prstDash val="solid"/>
-          </a:ln>
-        </p:spPr>
-      </p:sp>
-      <p:sp>
-        <p:nvSpPr>
-          <p:cNvPr id="34" name="Shape 27"/>
-          <p:cNvSpPr/>
-          <p:nvPr/>
-        </p:nvSpPr>
-        <p:spPr>
-          <a:xfrm>
-            <a:off x="4540394" y="3996592"/>
-            <a:ext cx="380990" cy="380990"/>
-          </a:xfrm>
-          <a:prstGeom prst="ellipse">
-            <a:avLst/>
-          </a:prstGeom>
-          <a:solidFill>
-            <a:srgbClr val="A0631A">
-              <a:alpha val="15000"/>
+            <a:srgbClr val="FFFFFF">
+              <a:alpha val="65000"/>
             </a:srgbClr>
           </a:solidFill>
           <a:ln/>
-        </p:spPr>
-      </p:sp>
-      <p:pic>
-        <p:nvPicPr>
-          <p:cNvPr id="35" name="Image 5" descr="/home/claude/pptx/icons/gear_o.png">    </p:cNvPr>
-          <p:cNvPicPr>
-            <a:picLocks noChangeAspect="1"/>
-          </p:cNvPicPr>
-          <p:nvPr/>
-        </p:nvPicPr>
-        <p:blipFill>
-          <a:blip r:embed="rId6"/>
-          <a:stretch>
-            <a:fillRect/>
-          </a:stretch>
-        </p:blipFill>
-        <p:spPr>
-          <a:xfrm>
-            <a:off x="4626117" y="4082315"/>
-            <a:ext cx="209545" cy="209545"/>
+          <a:effectLst>
+            <a:outerShdw sx="100000" sy="100000" kx="0" ky="0" algn="bl" rotWithShape="0" blurRad="152400" dist="38100" dir="5400000">
+              <a:srgbClr val="000000">
+                <a:alpha val="4000"/>
+              </a:srgbClr>
+            </a:outerShdw>
+          </a:effectLst>
+        </p:spPr>
+      </p:sp>
+      <p:sp>
+        <p:nvSpPr>
+          <p:cNvPr id="58" name="Shape 56"/>
+          <p:cNvSpPr/>
+          <p:nvPr/>
+        </p:nvSpPr>
+        <p:spPr>
+          <a:xfrm>
+            <a:off x="761695" y="5074920"/>
+            <a:ext cx="38100" cy="1207008"/>
           </a:xfrm>
           <a:prstGeom prst="rect">
             <a:avLst/>
           </a:prstGeom>
-        </p:spPr>
-      </p:pic>
-      <p:sp>
-        <p:nvSpPr>
-          <p:cNvPr id="36" name="Text 28"/>
-          <p:cNvSpPr txBox="1"/>
-          <p:nvPr/>
-        </p:nvSpPr>
-        <p:spPr>
-          <a:xfrm>
-            <a:off x="5049401" y="3978304"/>
-            <a:ext cx="2620188" cy="228594"/>
-          </a:xfrm>
-          <a:prstGeom prst="rect">
-            <a:avLst/>
-          </a:prstGeom>
-          <a:noFill/>
-          <a:ln/>
-        </p:spPr>
-        <p:txBody>
-          <a:bodyPr wrap="square" lIns="0" tIns="0" rIns="0" bIns="0" rtlCol="0" anchor="t"/>
-          <a:lstStyle/>
-          <a:p>
-            <a:pPr indent="0" marL="0">
-              <a:buNone/>
-            </a:pPr>
-            <a:r>
-              <a:rPr lang="en-US" sz="1400" b="1" dirty="0">
-                <a:solidFill>
-                  <a:srgbClr val="A0631A"/>
-                </a:solidFill>
-                <a:latin typeface="Courier New" pitchFamily="34" charset="0"/>
-                <a:ea typeface="Courier New" pitchFamily="34" charset="-122"/>
-                <a:cs typeface="Courier New" pitchFamily="34" charset="-120"/>
-              </a:rPr>
-              <a:t>UCB</a:t>
-            </a:r>
-            <a:endParaRPr lang="en-US" sz="1400" dirty="0"/>
-          </a:p>
-        </p:txBody>
-      </p:sp>
-      <p:sp>
-        <p:nvSpPr>
-          <p:cNvPr id="37" name="Text 29"/>
-          <p:cNvSpPr txBox="1"/>
-          <p:nvPr/>
-        </p:nvSpPr>
-        <p:spPr>
-          <a:xfrm>
-            <a:off x="5049401" y="4267093"/>
-            <a:ext cx="2620188" cy="476238"/>
-          </a:xfrm>
-          <a:prstGeom prst="rect">
-            <a:avLst/>
-          </a:prstGeom>
-          <a:noFill/>
-          <a:ln/>
-        </p:spPr>
-        <p:txBody>
-          <a:bodyPr wrap="square" lIns="0" tIns="0" rIns="0" bIns="0" rtlCol="0" anchor="t"/>
-          <a:lstStyle/>
-          <a:p>
-            <a:pPr indent="0" marL="0">
-              <a:lnSpc>
-                <a:spcPct val="115000"/>
-              </a:lnSpc>
-              <a:buNone/>
-            </a:pPr>
-            <a:r>
-              <a:rPr lang="en-US" sz="1050" dirty="0">
-                <a:solidFill>
-                  <a:srgbClr val="D9D9DE"/>
-                </a:solidFill>
-                <a:latin typeface="Source Sans Pro" pitchFamily="34" charset="0"/>
-                <a:ea typeface="Source Sans Pro" pitchFamily="34" charset="-122"/>
-                <a:cs typeface="Source Sans Pro" pitchFamily="34" charset="-120"/>
-              </a:rPr>
-              <a:t>Upper Confidence Bound: How the agent decides what to try next</a:t>
-            </a:r>
-            <a:endParaRPr lang="en-US" sz="1050" dirty="0"/>
-          </a:p>
-        </p:txBody>
-      </p:sp>
-      <p:sp>
-        <p:nvSpPr>
-          <p:cNvPr id="38" name="Shape 30"/>
-          <p:cNvSpPr/>
-          <p:nvPr/>
-        </p:nvSpPr>
-        <p:spPr>
-          <a:xfrm>
-            <a:off x="8026199" y="3905152"/>
-            <a:ext cx="3403515" cy="857229"/>
-          </a:xfrm>
-          <a:prstGeom prst="roundRect">
-            <a:avLst>
-              <a:gd name="adj" fmla="val 4267"/>
-            </a:avLst>
-          </a:prstGeom>
           <a:solidFill>
-            <a:srgbClr val="A0631A">
-              <a:alpha val="8000"/>
-            </a:srgbClr>
-          </a:solidFill>
-          <a:ln w="12700">
-            <a:solidFill>
-              <a:srgbClr val="A0631A">
-                <a:alpha val="15000"/>
-              </a:srgbClr>
-            </a:solidFill>
-            <a:prstDash val="solid"/>
-          </a:ln>
-        </p:spPr>
-      </p:sp>
-      <p:sp>
-        <p:nvSpPr>
-          <p:cNvPr id="39" name="Shape 31"/>
-          <p:cNvSpPr/>
-          <p:nvPr/>
-        </p:nvSpPr>
-        <p:spPr>
-          <a:xfrm>
-            <a:off x="8026199" y="3905152"/>
-            <a:ext cx="0" cy="857229"/>
-          </a:xfrm>
-          <a:prstGeom prst="line">
-            <a:avLst/>
-          </a:prstGeom>
-          <a:noFill/>
-          <a:ln w="28575">
-            <a:solidFill>
-              <a:srgbClr val="A0631A"/>
-            </a:solidFill>
-            <a:prstDash val="solid"/>
-          </a:ln>
-        </p:spPr>
-      </p:sp>
-      <p:sp>
-        <p:nvSpPr>
-          <p:cNvPr id="40" name="Shape 32"/>
-          <p:cNvSpPr/>
-          <p:nvPr/>
-        </p:nvSpPr>
-        <p:spPr>
-          <a:xfrm>
-            <a:off x="8172503" y="3996592"/>
-            <a:ext cx="380990" cy="380990"/>
-          </a:xfrm>
-          <a:prstGeom prst="ellipse">
-            <a:avLst/>
-          </a:prstGeom>
-          <a:solidFill>
-            <a:srgbClr val="A0631A">
-              <a:alpha val="15000"/>
-            </a:srgbClr>
+            <a:srgbClr val="8B1A1A"/>
           </a:solidFill>
           <a:ln/>
         </p:spPr>
       </p:sp>
-      <p:pic>
-        <p:nvPicPr>
-          <p:cNvPr id="41" name="Image 6" descr="/home/claude/pptx/icons/crosshair_o.png">    </p:cNvPr>
-          <p:cNvPicPr>
-            <a:picLocks noChangeAspect="1"/>
-          </p:cNvPicPr>
-          <p:nvPr/>
-        </p:nvPicPr>
-        <p:blipFill>
-          <a:blip r:embed="rId7"/>
-          <a:stretch>
-            <a:fillRect/>
-          </a:stretch>
-        </p:blipFill>
-        <p:spPr>
-          <a:xfrm>
-            <a:off x="8258226" y="4082315"/>
-            <a:ext cx="209545" cy="209545"/>
-          </a:xfrm>
-          <a:prstGeom prst="rect">
-            <a:avLst/>
-          </a:prstGeom>
-        </p:spPr>
-      </p:pic>
-      <p:sp>
-        <p:nvSpPr>
-          <p:cNvPr id="42" name="Text 33"/>
+      <p:sp>
+        <p:nvSpPr>
+          <p:cNvPr id="59" name="Text 57"/>
           <p:cNvSpPr txBox="1"/>
           <p:nvPr/>
         </p:nvSpPr>
         <p:spPr>
           <a:xfrm>
-            <a:off x="8681510" y="3978304"/>
-            <a:ext cx="2620188" cy="228594"/>
-          </a:xfrm>
-          <a:prstGeom prst="rect">
-            <a:avLst/>
-          </a:prstGeom>
-          <a:noFill/>
-          <a:ln/>
-        </p:spPr>
-        <p:txBody>
-          <a:bodyPr wrap="square" lIns="0" tIns="0" rIns="0" bIns="0" rtlCol="0" anchor="t"/>
-          <a:lstStyle/>
-          <a:p>
-            <a:pPr indent="0" marL="0">
-              <a:buNone/>
-            </a:pPr>
-            <a:r>
-              <a:rPr lang="en-US" sz="1400" b="1" dirty="0">
-                <a:solidFill>
-                  <a:srgbClr val="A0631A"/>
-                </a:solidFill>
-                <a:latin typeface="Courier New" pitchFamily="34" charset="0"/>
-                <a:ea typeface="Courier New" pitchFamily="34" charset="-122"/>
-                <a:cs typeface="Courier New" pitchFamily="34" charset="-120"/>
-              </a:rPr>
-              <a:t>ADM</a:t>
-            </a:r>
-            <a:endParaRPr lang="en-US" sz="1400" dirty="0"/>
-          </a:p>
-        </p:txBody>
-      </p:sp>
-      <p:sp>
-        <p:nvSpPr>
-          <p:cNvPr id="43" name="Text 34"/>
-          <p:cNvSpPr txBox="1"/>
-          <p:nvPr/>
-        </p:nvSpPr>
-        <p:spPr>
-          <a:xfrm>
-            <a:off x="8681510" y="4267093"/>
-            <a:ext cx="2620188" cy="476238"/>
-          </a:xfrm>
-          <a:prstGeom prst="rect">
-            <a:avLst/>
-          </a:prstGeom>
-          <a:noFill/>
-          <a:ln/>
-        </p:spPr>
-        <p:txBody>
-          <a:bodyPr wrap="square" lIns="0" tIns="0" rIns="0" bIns="0" rtlCol="0" anchor="t"/>
-          <a:lstStyle/>
-          <a:p>
-            <a:pPr indent="0" marL="0">
-              <a:lnSpc>
-                <a:spcPct val="115000"/>
-              </a:lnSpc>
-              <a:buNone/>
-            </a:pPr>
-            <a:r>
-              <a:rPr lang="en-US" sz="1050" dirty="0">
-                <a:solidFill>
-                  <a:srgbClr val="D9D9DE"/>
-                </a:solidFill>
-                <a:latin typeface="Source Sans Pro" pitchFamily="34" charset="0"/>
-                <a:ea typeface="Source Sans Pro" pitchFamily="34" charset="-122"/>
-                <a:cs typeface="Source Sans Pro" pitchFamily="34" charset="-120"/>
-              </a:rPr>
-              <a:t>Attack Decision-Making: The core challenge we address</a:t>
-            </a:r>
-            <a:endParaRPr lang="en-US" sz="1050" dirty="0"/>
-          </a:p>
-        </p:txBody>
-      </p:sp>
-      <p:sp>
-        <p:nvSpPr>
-          <p:cNvPr id="44" name="Shape 35"/>
-          <p:cNvSpPr/>
-          <p:nvPr/>
-        </p:nvSpPr>
-        <p:spPr>
-          <a:xfrm>
-            <a:off x="761981" y="5333867"/>
-            <a:ext cx="0" cy="666733"/>
-          </a:xfrm>
-          <a:prstGeom prst="line">
-            <a:avLst/>
-          </a:prstGeom>
-          <a:noFill/>
-          <a:ln w="28575">
-            <a:solidFill>
-              <a:srgbClr val="8B1A1A"/>
-            </a:solidFill>
-            <a:prstDash val="solid"/>
-          </a:ln>
-        </p:spPr>
-      </p:sp>
-      <p:sp>
-        <p:nvSpPr>
-          <p:cNvPr id="45" name="Text 36"/>
-          <p:cNvSpPr txBox="1"/>
-          <p:nvPr/>
-        </p:nvSpPr>
-        <p:spPr>
-          <a:xfrm>
-            <a:off x="908285" y="5315579"/>
-            <a:ext cx="5486400" cy="247644"/>
+            <a:off x="990295" y="5221224"/>
+            <a:ext cx="6400800" cy="329184"/>
           </a:xfrm>
           <a:prstGeom prst="rect">
             <a:avLst/>
@@ -2236,9 +2368,9 @@
               <a:buNone/>
             </a:pPr>
             <a:r>
-              <a:rPr lang="en-US" sz="1400" b="1" dirty="0">
+              <a:rPr lang="en-US" sz="1800" b="1" spc="100" kern="0" dirty="0">
                 <a:solidFill>
-                  <a:srgbClr val="F7F4EF"/>
+                  <a:srgbClr val="1A1A2E"/>
                 </a:solidFill>
                 <a:latin typeface="Playfair Display" pitchFamily="34" charset="0"/>
                 <a:ea typeface="Playfair Display" pitchFamily="34" charset="-122"/>
@@ -2246,20 +2378,20 @@
               </a:rPr>
               <a:t>Nishan Paul and Md Rakibur Rahman</a:t>
             </a:r>
-            <a:endParaRPr lang="en-US" sz="1400" dirty="0"/>
+            <a:endParaRPr lang="en-US" sz="1800" dirty="0"/>
           </a:p>
         </p:txBody>
       </p:sp>
       <p:sp>
         <p:nvSpPr>
-          <p:cNvPr id="46" name="Text 37"/>
+          <p:cNvPr id="60" name="Text 58"/>
           <p:cNvSpPr txBox="1"/>
           <p:nvPr/>
         </p:nvSpPr>
         <p:spPr>
           <a:xfrm>
-            <a:off x="908285" y="5600560"/>
-            <a:ext cx="5486400" cy="152396"/>
+            <a:off x="990295" y="5586984"/>
+            <a:ext cx="6400800" cy="182880"/>
           </a:xfrm>
           <a:prstGeom prst="rect">
             <a:avLst/>
@@ -2275,30 +2407,30 @@
               <a:buNone/>
             </a:pPr>
             <a:r>
-              <a:rPr lang="en-US" sz="850" b="1" spc="100" kern="0" dirty="0">
+              <a:rPr lang="en-US" sz="900" b="1" spc="150" kern="0" dirty="0">
                 <a:solidFill>
-                  <a:srgbClr val="8C8C99"/>
+                  <a:srgbClr val="5A5A6A"/>
                 </a:solidFill>
-                <a:latin typeface="Courier New" pitchFamily="34" charset="0"/>
-                <a:ea typeface="Courier New" pitchFamily="34" charset="-122"/>
-                <a:cs typeface="Courier New" pitchFamily="34" charset="-120"/>
+                <a:latin typeface="IBM Plex Mono" pitchFamily="34" charset="0"/>
+                <a:ea typeface="IBM Plex Mono" pitchFamily="34" charset="-122"/>
+                <a:cs typeface="IBM Plex Mono" pitchFamily="34" charset="-120"/>
               </a:rPr>
               <a:t>UNIVERSITY OF DHAKA</a:t>
             </a:r>
-            <a:endParaRPr lang="en-US" sz="850" dirty="0"/>
+            <a:endParaRPr lang="en-US" sz="900" dirty="0"/>
           </a:p>
         </p:txBody>
       </p:sp>
       <p:sp>
         <p:nvSpPr>
-          <p:cNvPr id="47" name="Text 38"/>
+          <p:cNvPr id="61" name="Text 59"/>
           <p:cNvSpPr txBox="1"/>
           <p:nvPr/>
         </p:nvSpPr>
         <p:spPr>
           <a:xfrm>
-            <a:off x="908285" y="5772006"/>
-            <a:ext cx="7315200" cy="152396"/>
+            <a:off x="990295" y="5797296"/>
+            <a:ext cx="6400800" cy="182880"/>
           </a:xfrm>
           <a:prstGeom prst="rect">
             <a:avLst/>
@@ -2314,30 +2446,30 @@
               <a:buNone/>
             </a:pPr>
             <a:r>
-              <a:rPr lang="en-US" sz="850" b="1" spc="100" kern="0" dirty="0">
+              <a:rPr lang="en-US" sz="900" b="1" spc="150" kern="0" dirty="0">
                 <a:solidFill>
-                  <a:srgbClr val="8C8C99"/>
+                  <a:srgbClr val="5A5A6A"/>
                 </a:solidFill>
-                <a:latin typeface="Courier New" pitchFamily="34" charset="0"/>
-                <a:ea typeface="Courier New" pitchFamily="34" charset="-122"/>
-                <a:cs typeface="Courier New" pitchFamily="34" charset="-120"/>
+                <a:latin typeface="IBM Plex Mono" pitchFamily="34" charset="0"/>
+                <a:ea typeface="IBM Plex Mono" pitchFamily="34" charset="-122"/>
+                <a:cs typeface="IBM Plex Mono" pitchFamily="34" charset="-120"/>
               </a:rPr>
               <a:t>PROFESSIONAL MASTERS IN INFORMATION AND CYBER SECURITY (PMICS)</a:t>
             </a:r>
-            <a:endParaRPr lang="en-US" sz="850" dirty="0"/>
+            <a:endParaRPr lang="en-US" sz="900" dirty="0"/>
           </a:p>
         </p:txBody>
       </p:sp>
       <p:sp>
         <p:nvSpPr>
-          <p:cNvPr id="48" name="Text 39"/>
+          <p:cNvPr id="62" name="Text 60"/>
           <p:cNvSpPr txBox="1"/>
           <p:nvPr/>
         </p:nvSpPr>
         <p:spPr>
           <a:xfrm>
-            <a:off x="908285" y="5943451"/>
-            <a:ext cx="7315200" cy="152396"/>
+            <a:off x="990295" y="6007608"/>
+            <a:ext cx="6400800" cy="182880"/>
           </a:xfrm>
           <a:prstGeom prst="rect">
             <a:avLst/>
@@ -2353,19 +2485,101 @@
               <a:buNone/>
             </a:pPr>
             <a:r>
-              <a:rPr lang="en-US" sz="850" b="1" spc="100" kern="0" dirty="0">
+              <a:rPr lang="en-US" sz="900" b="1" spc="150" kern="0" dirty="0">
                 <a:solidFill>
-                  <a:srgbClr val="8C8C99"/>
+                  <a:srgbClr val="5A5A6A"/>
                 </a:solidFill>
-                <a:latin typeface="Courier New" pitchFamily="34" charset="0"/>
-                <a:ea typeface="Courier New" pitchFamily="34" charset="-122"/>
-                <a:cs typeface="Courier New" pitchFamily="34" charset="-120"/>
+                <a:latin typeface="IBM Plex Mono" pitchFamily="34" charset="0"/>
+                <a:ea typeface="IBM Plex Mono" pitchFamily="34" charset="-122"/>
+                <a:cs typeface="IBM Plex Mono" pitchFamily="34" charset="-120"/>
               </a:rPr>
               <a:t>CSE 810: PROJECT ON CYBER SECURITY</a:t>
             </a:r>
-            <a:endParaRPr lang="en-US" sz="850" dirty="0"/>
+            <a:endParaRPr lang="en-US" sz="900" dirty="0"/>
           </a:p>
         </p:txBody>
+      </p:sp>
+      <p:sp>
+        <p:nvSpPr>
+          <p:cNvPr id="63" name="Shape 61"/>
+          <p:cNvSpPr/>
+          <p:nvPr/>
+        </p:nvSpPr>
+        <p:spPr>
+          <a:xfrm>
+            <a:off x="0" y="6515100"/>
+            <a:ext cx="12191695" cy="0"/>
+          </a:xfrm>
+          <a:prstGeom prst="line">
+            <a:avLst/>
+          </a:prstGeom>
+          <a:noFill/>
+          <a:ln w="9525">
+            <a:solidFill>
+              <a:srgbClr val="D4CFC8"/>
+            </a:solidFill>
+            <a:prstDash val="solid"/>
+          </a:ln>
+        </p:spPr>
+      </p:sp>
+      <p:sp>
+        <p:nvSpPr>
+          <p:cNvPr id="64" name="Text 62"/>
+          <p:cNvSpPr txBox="1"/>
+          <p:nvPr/>
+        </p:nvSpPr>
+        <p:spPr>
+          <a:xfrm>
+            <a:off x="9784080" y="6572250"/>
+            <a:ext cx="1554480" cy="228600"/>
+          </a:xfrm>
+          <a:prstGeom prst="rect">
+            <a:avLst/>
+          </a:prstGeom>
+          <a:noFill/>
+          <a:ln/>
+        </p:spPr>
+        <p:txBody>
+          <a:bodyPr wrap="square" lIns="0" tIns="0" rIns="0" bIns="0" rtlCol="0" anchor="ctr"/>
+          <a:lstStyle/>
+          <a:p>
+            <a:pPr algn="r" indent="0" marL="0">
+              <a:buNone/>
+            </a:pPr>
+            <a:r>
+              <a:rPr lang="en-US" sz="950" b="1" dirty="0">
+                <a:solidFill>
+                  <a:srgbClr val="9A9AAA"/>
+                </a:solidFill>
+                <a:latin typeface="IBM Plex Mono" pitchFamily="34" charset="0"/>
+                <a:ea typeface="IBM Plex Mono" pitchFamily="34" charset="-122"/>
+                <a:cs typeface="IBM Plex Mono" pitchFamily="34" charset="-120"/>
+              </a:rPr>
+              <a:t>20 / 21</a:t>
+            </a:r>
+            <a:endParaRPr lang="en-US" sz="950" dirty="0"/>
+          </a:p>
+        </p:txBody>
+      </p:sp>
+      <p:sp>
+        <p:nvSpPr>
+          <p:cNvPr id="65" name="Shape 63"/>
+          <p:cNvSpPr/>
+          <p:nvPr/>
+        </p:nvSpPr>
+        <p:spPr>
+          <a:xfrm>
+            <a:off x="0" y="6819900"/>
+            <a:ext cx="11582400" cy="38100"/>
+          </a:xfrm>
+          <a:prstGeom prst="rect">
+            <a:avLst/>
+          </a:prstGeom>
+          <a:solidFill>
+            <a:srgbClr val="8B1A1A"/>
+          </a:solidFill>
+          <a:ln/>
+        </p:spPr>
       </p:sp>
     </p:spTree>
   </p:cSld>
